--- a/decks/Bhagavadgita_Concept_KG_hi.pptx
+++ b/decks/Bhagavadgita_Concept_KG_hi.pptx
@@ -3385,7 +3385,7 @@
                 <a:ea typeface="Tiro Devanagari Hindi" pitchFamily="34" charset="-122"/>
                 <a:cs typeface="Tiro Devanagari Hindi" pitchFamily="34" charset="-120"/>
               </a:rPr>
-              <a:t>अंतःकरण</a:t>
+              <a:t>à¤…à¤‚à¤¤à¤ƒà¤•à¤°à¤£</a:t>
             </a:r>
             <a:endParaRPr lang="en-US" sz="3000" dirty="0"/>
           </a:p>
@@ -3516,7 +3516,7 @@
                 <a:ea typeface="Tiro Devanagari Hindi" pitchFamily="34" charset="-122"/>
                 <a:cs typeface="Tiro Devanagari Hindi" pitchFamily="34" charset="-120"/>
               </a:rPr>
-              <a:t>अंतर्यामी — हृदय-स्थित हरि</a:t>
+              <a:t>à¤…à¤‚à¤¤à¤°à¥à¤¯à¤¾à¤®à¥€ â€” à¤¹à¥ƒà¤¦à¤¯-à¤¸à¥à¤¥à¤¿à¤¤ à¤¹à¤°à¤¿</a:t>
             </a:r>
             <a:endParaRPr lang="en-US" sz="1300" dirty="0"/>
           </a:p>
@@ -3597,7 +3597,7 @@
                 <a:ea typeface="Tiro Devanagari Hindi" pitchFamily="34" charset="-122"/>
                 <a:cs typeface="Tiro Devanagari Hindi" pitchFamily="34" charset="-120"/>
               </a:rPr>
-              <a:t>‘ईश्वरः सर्व-भूतानां हृद्-देशे तिष्ठति’ — हरि हर प्राणी के हृदय में स्थित होकर उसे चलाते हैं।</a:t>
+              <a:t>â€˜à¤ˆà¤¶à¥à¤µà¤°à¤ƒ à¤¸à¤°à¥à¤µ-à¤­à¥‚à¤¤à¤¾à¤¨à¤¾à¤‚ à¤¹à¥ƒà¤¦à¥-à¤¦à¥‡à¤¶à¥‡ à¤¤à¤¿à¤·à¥à¤ à¤¤à¤¿â€™ â€” à¤¹à¤°à¤¿ à¤¹à¤° à¤ªà¥à¤°à¤¾à¤£à¥€ à¤•à¥‡ à¤¹à¥ƒà¤¦à¤¯ à¤®à¥‡à¤‚ à¤¸à¥à¤¥à¤¿à¤¤ à¤¹à¥‹à¤•à¤° à¤‰à¤¸à¥‡ à¤šà¤²à¤¾à¤¤à¥‡ à¤¹à¥ˆà¤‚à¥¤</a:t>
             </a:r>
             <a:endParaRPr lang="en-US" sz="1050" dirty="0"/>
           </a:p>
@@ -3686,7 +3686,7 @@
                 <a:ea typeface="Tiro Devanagari Hindi" pitchFamily="34" charset="-122"/>
                 <a:cs typeface="Tiro Devanagari Hindi" pitchFamily="34" charset="-120"/>
               </a:rPr>
-              <a:t>मन — ग्यारहवीं इंद्रिय</a:t>
+              <a:t>à¤®à¤¨ â€” à¤—à¥à¤¯à¤¾à¤°à¤¹à¤µà¥€à¤‚ à¤‡à¤‚à¤¦à¥à¤°à¤¿à¤¯</a:t>
             </a:r>
             <a:endParaRPr lang="en-US" sz="1300" dirty="0"/>
           </a:p>
@@ -3725,7 +3725,7 @@
                 <a:ea typeface="Cormorant Garamond" pitchFamily="34" charset="-122"/>
                 <a:cs typeface="Cormorant Garamond" pitchFamily="34" charset="-120"/>
               </a:rPr>
-              <a:t>BG 6.34–35 · 3.6–7</a:t>
+              <a:t>BG 6.34â€“35 Â· 3.6â€“7</a:t>
             </a:r>
             <a:endParaRPr lang="en-US" sz="950" dirty="0"/>
           </a:p>
@@ -3767,7 +3767,7 @@
                 <a:ea typeface="Tiro Devanagari Hindi" pitchFamily="34" charset="-122"/>
                 <a:cs typeface="Tiro Devanagari Hindi" pitchFamily="34" charset="-120"/>
               </a:rPr>
-              <a:t>ग्यारहवीं इंद्रिय। चंचल, अशांत, वश में लाना कठिन — पर कृष्ण कहते हैं कि अभ्यास और वैराग्य से इसे जीता जा सकता है।</a:t>
+              <a:t>à¤—à¥à¤¯à¤¾à¤°à¤¹à¤µà¥€à¤‚ à¤‡à¤‚à¤¦à¥à¤°à¤¿à¤¯à¥¤ à¤šà¤‚à¤šà¤², à¤…à¤¶à¤¾à¤‚à¤¤, à¤µà¤¶ à¤®à¥‡à¤‚ à¤²à¤¾à¤¨à¤¾ à¤•à¤ à¤¿à¤¨ â€” à¤ªà¤° à¤•à¥ƒà¤·à¥à¤£ à¤•à¤¹à¤¤à¥‡ à¤¹à¥ˆà¤‚ à¤•à¤¿ à¤…à¤­à¥à¤¯à¤¾à¤¸ à¤”à¤° à¤µà¥ˆà¤°à¤¾à¤—à¥à¤¯ à¤¸à¥‡ à¤‡à¤¸à¥‡ à¤œà¥€à¤¤…</a:t>
             </a:r>
             <a:endParaRPr lang="en-US" sz="1050" dirty="0"/>
           </a:p>
@@ -3856,7 +3856,7 @@
                 <a:ea typeface="Tiro Devanagari Hindi" pitchFamily="34" charset="-122"/>
                 <a:cs typeface="Tiro Devanagari Hindi" pitchFamily="34" charset="-120"/>
               </a:rPr>
-              <a:t>बुद्धि — विवेक-शक्ति</a:t>
+              <a:t>à¤¬à¥à¤¦à¥à¤§à¤¿ â€” à¤µà¤¿à¤µà¥‡à¤•-à¤¶à¤•à¥à¤¤à¤¿</a:t>
             </a:r>
             <a:endParaRPr lang="en-US" sz="1300" dirty="0"/>
           </a:p>
@@ -3895,7 +3895,7 @@
                 <a:ea typeface="Cormorant Garamond" pitchFamily="34" charset="-122"/>
                 <a:cs typeface="Cormorant Garamond" pitchFamily="34" charset="-120"/>
               </a:rPr>
-              <a:t>BG 18.30–32</a:t>
+              <a:t>BG 18.30â€“32</a:t>
             </a:r>
             <a:endParaRPr lang="en-US" sz="950" dirty="0"/>
           </a:p>
@@ -3937,7 +3937,7 @@
                 <a:ea typeface="Tiro Devanagari Hindi" pitchFamily="34" charset="-122"/>
                 <a:cs typeface="Tiro Devanagari Hindi" pitchFamily="34" charset="-120"/>
               </a:rPr>
-              <a:t>वह शक्ति जो कर्तव्य और अकर्तव्य, करने योग्य और न करने योग्य का विवेक करती है। सात्त्विक बुद्धि प्रवृत्ति और निवृत्ति को जानती है।</a:t>
+              <a:t>à¤µà¤¹ à¤¶à¤•à¥à¤¤à¤¿ à¤œà¥‹ à¤•à¤°à¥à¤¤à¤µà¥à¤¯ à¤”à¤° à¤…à¤•à¤°à¥à¤¤à¤µà¥à¤¯, à¤•à¤°à¤¨à¥‡ à¤¯à¥‹à¤—à¥à¤¯ à¤”à¤° à¤¨ à¤•à¤°à¤¨à¥‡ à¤¯à¥‹à¤—à¥à¤¯ à¤•à¤¾ à¤µà¤¿à¤µà¥‡à¤• à¤•à¤°à¤¤à¥€ à¤¹à¥ˆà¥¤ à¤¸à¤¾à¤¤à¥à¤¤à¥à¤µà¤¿à¤• à¤¬à¥à¤¦à¥à¤§à¤¿ à¤ªà¥à¤°à¤…</a:t>
             </a:r>
             <a:endParaRPr lang="en-US" sz="1050" dirty="0"/>
           </a:p>
@@ -4026,7 +4026,7 @@
                 <a:ea typeface="Tiro Devanagari Hindi" pitchFamily="34" charset="-122"/>
                 <a:cs typeface="Tiro Devanagari Hindi" pitchFamily="34" charset="-120"/>
               </a:rPr>
-              <a:t>अहंकार — मैंपन</a:t>
+              <a:t>à¤…à¤¹à¤‚à¤•à¤¾à¤° â€” à¤®à¥ˆà¤‚à¤ªà¤¨</a:t>
             </a:r>
             <a:endParaRPr lang="en-US" sz="1300" dirty="0"/>
           </a:p>
@@ -4065,7 +4065,7 @@
                 <a:ea typeface="Cormorant Garamond" pitchFamily="34" charset="-122"/>
                 <a:cs typeface="Cormorant Garamond" pitchFamily="34" charset="-120"/>
               </a:rPr>
-              <a:t>BG 3.27 · 7.4</a:t>
+              <a:t>BG 3.27 Â· 7.4</a:t>
             </a:r>
             <a:endParaRPr lang="en-US" sz="950" dirty="0"/>
           </a:p>
@@ -4107,7 +4107,7 @@
                 <a:ea typeface="Tiro Devanagari Hindi" pitchFamily="34" charset="-122"/>
                 <a:cs typeface="Tiro Devanagari Hindi" pitchFamily="34" charset="-120"/>
               </a:rPr>
-              <a:t>कर्ता होने का बोध। ‘कर्ताहम् इति मन्यते’ — जब पुरुष अहंकार से मोहित होता है, तब वह स्वयं को कर्ता मान बैठता है।</a:t>
+              <a:t>à¤•à¤°à¥à¤¤à¤¾ à¤¹à¥‹à¤¨à¥‡ à¤•à¤¾ à¤¬à¥‹à¤§à¥¤ â€˜à¤•à¤°à¥à¤¤à¤¾à¤¹à¤®à¥ à¤‡à¤¤à¤¿ à¤®à¤¨à¥à¤¯à¤¤à¥‡â€™ â€” à¤œà¤¬ à¤ªà¥à¤°à¥à¤· à¤…à¤¹à¤‚à¤•à¤¾à¤° à¤¸à¥‡ à¤®à¥‹à¤¹à¤¿à¤¤ à¤¹à¥‹à¤¤à¤¾ à¤¹à¥ˆ, à¤¤à¤¬ à¤µà¤¹ à¤¸à¥à¤µà¤¯à¤‚ à¤•à¥‹ à¤•à¤°à¥à¤¤à¤¾ à¤®à¤¾…</a:t>
             </a:r>
             <a:endParaRPr lang="en-US" sz="1050" dirty="0"/>
           </a:p>
@@ -4217,7 +4217,7 @@
                 <a:ea typeface="Tiro Devanagari Hindi" pitchFamily="34" charset="-122"/>
                 <a:cs typeface="Tiro Devanagari Hindi" pitchFamily="34" charset="-120"/>
               </a:rPr>
-              <a:t>धर्म</a:t>
+              <a:t>à¤§à¤°à¥à¤®</a:t>
             </a:r>
             <a:endParaRPr lang="en-US" sz="3000" dirty="0"/>
           </a:p>
@@ -4348,7 +4348,7 @@
                 <a:ea typeface="Tiro Devanagari Hindi" pitchFamily="34" charset="-122"/>
                 <a:cs typeface="Tiro Devanagari Hindi" pitchFamily="34" charset="-120"/>
               </a:rPr>
-              <a:t>स्वधर्म — अपना धर्म</a:t>
+              <a:t>à¤¸à¥à¤µà¤§à¤°à¥à¤® â€” à¤…à¤ªà¤¨à¤¾ à¤§à¤°à¥à¤®</a:t>
             </a:r>
             <a:endParaRPr lang="en-US" sz="1300" dirty="0"/>
           </a:p>
@@ -4387,7 +4387,7 @@
                 <a:ea typeface="Cormorant Garamond" pitchFamily="34" charset="-122"/>
                 <a:cs typeface="Cormorant Garamond" pitchFamily="34" charset="-120"/>
               </a:rPr>
-              <a:t>BG 3.35 · 18.47</a:t>
+              <a:t>BG 3.35 Â· 18.47</a:t>
             </a:r>
             <a:endParaRPr lang="en-US" sz="950" dirty="0"/>
           </a:p>
@@ -4429,7 +4429,7 @@
                 <a:ea typeface="Tiro Devanagari Hindi" pitchFamily="34" charset="-122"/>
                 <a:cs typeface="Tiro Devanagari Hindi" pitchFamily="34" charset="-120"/>
               </a:rPr>
-              <a:t>‘अपना धर्म ठीक से न निभाने पर भी पराये धर्म से अच्छा है’ — स्वभाव से उत्पन्न कर्तव्य का पालन।</a:t>
+              <a:t>â€˜à¤…à¤ªà¤¨à¤¾ à¤§à¤°à¥à¤® à¤ à¥€à¤• à¤¸à¥‡ à¤¨ à¤¨à¤¿à¤­à¤¾à¤¨à¥‡ à¤ªà¤° à¤­à¥€ à¤ªà¤°à¤¾à¤¯à¥‡ à¤§à¤°à¥à¤® à¤¸à¥‡ à¤…à¤šà¥à¤›à¤¾ à¤¹à¥ˆâ€™ â€” à¤¸à¥à¤µà¤­à¤¾à¤µ à¤¸à¥‡ à¤‰à¤¤à¥à¤ªà¤¨à¥à¤¨ à¤•à¤°à¥à¤¤à¤µà¥à¤¯ à¤•à¤¾ à¤ªà¤¾à¤²à¤¨à¥¤</a:t>
             </a:r>
             <a:endParaRPr lang="en-US" sz="1050" dirty="0"/>
           </a:p>
@@ -4518,7 +4518,7 @@
                 <a:ea typeface="Tiro Devanagari Hindi" pitchFamily="34" charset="-122"/>
                 <a:cs typeface="Tiro Devanagari Hindi" pitchFamily="34" charset="-120"/>
               </a:rPr>
-              <a:t>वर्णाश्रम-धर्म</a:t>
+              <a:t>à¤µà¤°à¥à¤£à¤¾à¤¶à¥à¤°à¤®-à¤§à¤°à¥à¤®</a:t>
             </a:r>
             <a:endParaRPr lang="en-US" sz="1300" dirty="0"/>
           </a:p>
@@ -4557,7 +4557,7 @@
                 <a:ea typeface="Cormorant Garamond" pitchFamily="34" charset="-122"/>
                 <a:cs typeface="Cormorant Garamond" pitchFamily="34" charset="-120"/>
               </a:rPr>
-              <a:t>BG 4.13 · 18.41–44</a:t>
+              <a:t>BG 4.13 Â· 18.41â€“44</a:t>
             </a:r>
             <a:endParaRPr lang="en-US" sz="950" dirty="0"/>
           </a:p>
@@ -4599,7 +4599,7 @@
                 <a:ea typeface="Tiro Devanagari Hindi" pitchFamily="34" charset="-122"/>
                 <a:cs typeface="Tiro Devanagari Hindi" pitchFamily="34" charset="-120"/>
               </a:rPr>
-              <a:t>ब्राह्मण, क्षत्रिय, वैश्य, शूद्र — गुण-कर्म-विभाग से उत्पन्न कर्तव्य। मध्व: यह नित्य स्वरूप-योग्यता पर आधारित।</a:t>
+              <a:t>à¤¬à¥à¤°à¤¾à¤¹à¥à¤®à¤£, à¤•à¥à¤·à¤¤à¥à¤°à¤¿à¤¯, à¤µà¥ˆà¤¶à¥à¤¯, à¤¶à¥‚à¤¦à¥à¤° â€” à¤—à¥à¤£-à¤•à¤°à¥à¤®-à¤µà¤¿à¤­à¤¾à¤— à¤¸à¥‡ à¤‰à¤¤à¥à¤ªà¤¨à¥à¤¨ à¤•à¤°à¥à¤¤à¤µà¥à¤¯à¥¤ à¤®à¤§à¥à¤µ: à¤¯à¤¹ à¤¨à¤¿à¤¤à¥à¤¯ à¤¸à¥à¤µà¤°à¥‚à¤ª-à¤¯à¥‹à¤—à¥à¤¯à¤¤à¤…</a:t>
             </a:r>
             <a:endParaRPr lang="en-US" sz="1050" dirty="0"/>
           </a:p>
@@ -4688,7 +4688,7 @@
                 <a:ea typeface="Tiro Devanagari Hindi" pitchFamily="34" charset="-122"/>
                 <a:cs typeface="Tiro Devanagari Hindi" pitchFamily="34" charset="-120"/>
               </a:rPr>
-              <a:t>निष्काम कर्म</a:t>
+              <a:t>à¤¨à¤¿à¤·à¥à¤•à¤¾à¤® à¤•à¤°à¥à¤®</a:t>
             </a:r>
             <a:endParaRPr lang="en-US" sz="1300" dirty="0"/>
           </a:p>
@@ -4727,7 +4727,7 @@
                 <a:ea typeface="Cormorant Garamond" pitchFamily="34" charset="-122"/>
                 <a:cs typeface="Cormorant Garamond" pitchFamily="34" charset="-120"/>
               </a:rPr>
-              <a:t>BG 2.47 · 4.20</a:t>
+              <a:t>BG 2.47 Â· 4.20</a:t>
             </a:r>
             <a:endParaRPr lang="en-US" sz="950" dirty="0"/>
           </a:p>
@@ -4769,7 +4769,7 @@
                 <a:ea typeface="Tiro Devanagari Hindi" pitchFamily="34" charset="-122"/>
                 <a:cs typeface="Tiro Devanagari Hindi" pitchFamily="34" charset="-120"/>
               </a:rPr>
-              <a:t>फल की कामना के बिना किया गया कर्म। गीता की सबसे विशिष्ट नैतिक माँग।</a:t>
+              <a:t>à¤«à¤² à¤•à¥€ à¤•à¤¾à¤®à¤¨à¤¾ à¤•à¥‡ à¤¬à¤¿à¤¨à¤¾ à¤•à¤¿à¤¯à¤¾ à¤—à¤¯à¤¾ à¤•à¤°à¥à¤®à¥¤ à¤—à¥€à¤¤à¤¾ à¤•à¥€ à¤¸à¤¬à¤¸à¥‡ à¤µà¤¿à¤¶à¤¿à¤·à¥à¤Ÿ à¤¨à¥ˆà¤¤à¤¿à¤• à¤®à¤¾à¤à¤—à¥¤</a:t>
             </a:r>
             <a:endParaRPr lang="en-US" sz="1050" dirty="0"/>
           </a:p>
@@ -4858,7 +4858,7 @@
                 <a:ea typeface="Tiro Devanagari Hindi" pitchFamily="34" charset="-122"/>
                 <a:cs typeface="Tiro Devanagari Hindi" pitchFamily="34" charset="-120"/>
               </a:rPr>
-              <a:t>स्थितप्रज्ञ — स्थिर ज्ञान वाला</a:t>
+              <a:t>à¤¸à¥à¤¥à¤¿à¤¤à¤ªà¥à¤°à¤œà¥à¤ž â€” à¤¸à¥à¤¥à¤¿à¤° à¤œà¥à¤žà¤¾à¤¨ à¤µà¤¾à¤²à¤¾</a:t>
             </a:r>
             <a:endParaRPr lang="en-US" sz="1300" dirty="0"/>
           </a:p>
@@ -4897,7 +4897,7 @@
                 <a:ea typeface="Cormorant Garamond" pitchFamily="34" charset="-122"/>
                 <a:cs typeface="Cormorant Garamond" pitchFamily="34" charset="-120"/>
               </a:rPr>
-              <a:t>BG 2.55–72</a:t>
+              <a:t>BG 2.55â€“72</a:t>
             </a:r>
             <a:endParaRPr lang="en-US" sz="950" dirty="0"/>
           </a:p>
@@ -4939,7 +4939,7 @@
                 <a:ea typeface="Tiro Devanagari Hindi" pitchFamily="34" charset="-122"/>
                 <a:cs typeface="Tiro Devanagari Hindi" pitchFamily="34" charset="-120"/>
               </a:rPr>
-              <a:t>सुख-दुख में उदासीन, आसक्ति, भय और क्रोध से मुक्त; इंद्रियाँ पूरी तरह अंतर्मुख। दूसरे अध्याय का समापन-चित्र।</a:t>
+              <a:t>à¤¸à¥à¤–-à¤¦à¥à¤– à¤®à¥‡à¤‚ à¤‰à¤¦à¤¾à¤¸à¥€à¤¨, à¤†à¤¸à¤•à¥à¤¤à¤¿, à¤­à¤¯ à¤”à¤° à¤•à¥à¤°à¥‹à¤§ à¤¸à¥‡ à¤®à¥à¤•à¥à¤¤; à¤‡à¤‚à¤¦à¥à¤°à¤¿à¤¯à¤¾à¤ à¤ªà¥‚à¤°à¥€ à¤¤à¤°à¤¹ à¤…à¤‚à¤¤à¤°à¥à¤®à¥à¤–à¥¤ à¤¦à¥‚à¤¸à¤°à¥‡ à¤…à¤§à¥à¤¯à¤¾à¤¯ à¤•à¤¾ à¤¸à¤®à¤¾à¤ªà…</a:t>
             </a:r>
             <a:endParaRPr lang="en-US" sz="1050" dirty="0"/>
           </a:p>
@@ -5049,7 +5049,7 @@
                 <a:ea typeface="Tiro Devanagari Hindi" pitchFamily="34" charset="-122"/>
                 <a:cs typeface="Tiro Devanagari Hindi" pitchFamily="34" charset="-120"/>
               </a:rPr>
-              <a:t>दोष</a:t>
+              <a:t>à¤¦à¥‹à¤·</a:t>
             </a:r>
             <a:endParaRPr lang="en-US" sz="3000" dirty="0"/>
           </a:p>
@@ -5180,7 +5180,7 @@
                 <a:ea typeface="Tiro Devanagari Hindi" pitchFamily="34" charset="-122"/>
                 <a:cs typeface="Tiro Devanagari Hindi" pitchFamily="34" charset="-120"/>
               </a:rPr>
-              <a:t>आसुरी सम्पद् — आसुरी गुण</a:t>
+              <a:t>à¤†à¤¸à¥à¤°à¥€ à¤¸à¤®à¥à¤ªà¤¦à¥ â€” à¤†à¤¸à¥à¤°à¥€ à¤—à¥à¤£</a:t>
             </a:r>
             <a:endParaRPr lang="en-US" sz="1300" dirty="0"/>
           </a:p>
@@ -5219,7 +5219,7 @@
                 <a:ea typeface="Cormorant Garamond" pitchFamily="34" charset="-122"/>
                 <a:cs typeface="Cormorant Garamond" pitchFamily="34" charset="-120"/>
               </a:rPr>
-              <a:t>BG 16.4 · 16.7–20</a:t>
+              <a:t>BG 16.4 Â· 16.7â€“20</a:t>
             </a:r>
             <a:endParaRPr lang="en-US" sz="950" dirty="0"/>
           </a:p>
@@ -5261,7 +5261,7 @@
                 <a:ea typeface="Tiro Devanagari Hindi" pitchFamily="34" charset="-122"/>
                 <a:cs typeface="Tiro Devanagari Hindi" pitchFamily="34" charset="-120"/>
               </a:rPr>
-              <a:t>दम्भ, दर्प, अभिमान, क्रोध, कठोरता, अज्ञान — दैवी सम्पद् के विपरीत। बंधन की ओर ले जाती है।</a:t>
+              <a:t>à¤¦à¤®à¥à¤­, à¤¦à¤°à¥à¤ª, à¤…à¤­à¤¿à¤®à¤¾à¤¨, à¤•à¥à¤°à¥‹à¤§, à¤•à¤ à¥‹à¤°à¤¤à¤¾, à¤…à¤œà¥à¤žà¤¾à¤¨ â€” à¤¦à¥ˆà¤µà¥€ à¤¸à¤®à¥à¤ªà¤¦à¥ à¤•à¥‡ à¤µà¤¿à¤ªà¤°à¥€à¤¤à¥¤ à¤¬à¤‚à¤§à¤¨ à¤•à¥€ à¤“à¤° à¤²à¥‡ à¤œà¤¾à¤¤à¥€ à¤¹à¥ˆà¥¤</a:t>
             </a:r>
             <a:endParaRPr lang="en-US" sz="1050" dirty="0"/>
           </a:p>
@@ -5350,7 +5350,7 @@
                 <a:ea typeface="Tiro Devanagari Hindi" pitchFamily="34" charset="-122"/>
                 <a:cs typeface="Tiro Devanagari Hindi" pitchFamily="34" charset="-120"/>
               </a:rPr>
-              <a:t>काम — इच्छा</a:t>
+              <a:t>à¤•à¤¾à¤® â€” à¤‡à¤šà¥à¤›à¤¾</a:t>
             </a:r>
             <a:endParaRPr lang="en-US" sz="1300" dirty="0"/>
           </a:p>
@@ -5389,7 +5389,7 @@
                 <a:ea typeface="Cormorant Garamond" pitchFamily="34" charset="-122"/>
                 <a:cs typeface="Cormorant Garamond" pitchFamily="34" charset="-120"/>
               </a:rPr>
-              <a:t>BG 3.37–39</a:t>
+              <a:t>BG 3.37â€“39</a:t>
             </a:r>
             <a:endParaRPr lang="en-US" sz="950" dirty="0"/>
           </a:p>
@@ -5431,7 +5431,7 @@
                 <a:ea typeface="Tiro Devanagari Hindi" pitchFamily="34" charset="-122"/>
                 <a:cs typeface="Tiro Devanagari Hindi" pitchFamily="34" charset="-120"/>
               </a:rPr>
-              <a:t>‘यह रजोगुण से उत्पन्न, सब कुछ निगलने वाला, महान पापी — इसे ही यहाँ शत्रु जान’ (गीता ३.३७) — कृष्ण काम को प्रमुख शत्रु बताते हैं।</a:t>
+              <a:t>â€˜à¤¯à¤¹ à¤°à¤œà¥‹à¤—à¥à¤£ à¤¸à¥‡ à¤‰à¤¤à¥à¤ªà¤¨à¥à¤¨, à¤¸à¤¬ à¤•à¥à¤› à¤¨à¤¿à¤—à¤²à¤¨à¥‡ à¤µà¤¾à¤²à¤¾, à¤®à¤¹à¤¾à¤¨ à¤ªà¤¾à¤ªà¥€ â€” à¤‡à¤¸à¥‡ à¤¹à¥€ à¤¯à¤¹à¤¾à¤ à¤¶à¤¤à¥à¤°à¥ à¤œà¤¾à¤¨â€™ (à¤—à¥€à¤¤à¤¾ à¥©.à¥©à¥­) â€” à¤•à¥ƒà¤·à¥à¤£ à¤•à¤¾à¤® à¤•à…</a:t>
             </a:r>
             <a:endParaRPr lang="en-US" sz="1050" dirty="0"/>
           </a:p>
@@ -5520,7 +5520,7 @@
                 <a:ea typeface="Tiro Devanagari Hindi" pitchFamily="34" charset="-122"/>
                 <a:cs typeface="Tiro Devanagari Hindi" pitchFamily="34" charset="-120"/>
               </a:rPr>
-              <a:t>क्रोध</a:t>
+              <a:t>à¤•à¥à¤°à¥‹à¤§</a:t>
             </a:r>
             <a:endParaRPr lang="en-US" sz="1300" dirty="0"/>
           </a:p>
@@ -5559,7 +5559,7 @@
                 <a:ea typeface="Cormorant Garamond" pitchFamily="34" charset="-122"/>
                 <a:cs typeface="Cormorant Garamond" pitchFamily="34" charset="-120"/>
               </a:rPr>
-              <a:t>BG 2.62–63 · 3.37</a:t>
+              <a:t>BG 2.62â€“63 Â· 3.37</a:t>
             </a:r>
             <a:endParaRPr lang="en-US" sz="950" dirty="0"/>
           </a:p>
@@ -5601,7 +5601,7 @@
                 <a:ea typeface="Tiro Devanagari Hindi" pitchFamily="34" charset="-122"/>
                 <a:cs typeface="Tiro Devanagari Hindi" pitchFamily="34" charset="-120"/>
               </a:rPr>
-              <a:t>काम के विघात (इच्छा के अधूरे रहने) से क्रोध जन्म लेता है; क्रोध से सम्मोह; सम्मोह से स्मृति का भ्रम; और फिर बुद्धि-नाश।</a:t>
+              <a:t>à¤•à¤¾à¤® à¤•à¥‡ à¤µà¤¿à¤˜à¤¾à¤¤ (à¤‡à¤šà¥à¤›à¤¾ à¤•à¥‡ à¤…à¤§à¥‚à¤°à¥‡ à¤°à¤¹à¤¨à¥‡) à¤¸à¥‡ à¤•à¥à¤°à¥‹à¤§ à¤œà¤¨à¥à¤® à¤²à¥‡à¤¤à¤¾ à¤¹à¥ˆ; à¤•à¥à¤°à¥‹à¤§ à¤¸à¥‡ à¤¸à¤®à¥à¤®à¥‹à¤¹; à¤¸à¤®à¥à¤®à¥‹à¤¹ à¤¸à¥‡ à¤¸à¥à¤®à¥ƒà¤¤à¤¿ à¤•à¤¾ à¤­à¥à¤°à¤®; à¤”à¤…</a:t>
             </a:r>
             <a:endParaRPr lang="en-US" sz="1050" dirty="0"/>
           </a:p>
@@ -5690,7 +5690,7 @@
                 <a:ea typeface="Tiro Devanagari Hindi" pitchFamily="34" charset="-122"/>
                 <a:cs typeface="Tiro Devanagari Hindi" pitchFamily="34" charset="-120"/>
               </a:rPr>
-              <a:t>लोभ</a:t>
+              <a:t>à¤²à¥‹à¤­</a:t>
             </a:r>
             <a:endParaRPr lang="en-US" sz="1300" dirty="0"/>
           </a:p>
@@ -5771,7 +5771,7 @@
                 <a:ea typeface="Tiro Devanagari Hindi" pitchFamily="34" charset="-122"/>
                 <a:cs typeface="Tiro Devanagari Hindi" pitchFamily="34" charset="-120"/>
               </a:rPr>
-              <a:t>काम, क्रोध के साथ — नरक के तीन द्वारों में से एक। मार्ग की दहलीज़ पर ही इसे छोड़ देना है।</a:t>
+              <a:t>à¤•à¤¾à¤®, à¤•à¥à¤°à¥‹à¤§ à¤•à¥‡ à¤¸à¤¾à¤¥ â€” à¤¨à¤°à¤• à¤•à¥‡ à¤¤à¥€à¤¨ à¤¦à¥à¤µà¤¾à¤°à¥‹à¤‚ à¤®à¥‡à¤‚ à¤¸à¥‡ à¤à¤•à¥¤ à¤®à¤¾à¤°à¥à¤— à¤•à¥€ à¤¦à¤¹à¤²à¥€à¤œà¤¼ à¤ªà¤° à¤¹à¥€ à¤‡à¤¸à¥‡ à¤›à¥‹à¤¡à¤¼ à¤¦à¥‡à¤¨à¤¾ à¤¹à¥ˆà¥¤</a:t>
             </a:r>
             <a:endParaRPr lang="en-US" sz="1050" dirty="0"/>
           </a:p>
@@ -5881,7 +5881,7 @@
                 <a:ea typeface="Tiro Devanagari Hindi" pitchFamily="34" charset="-122"/>
                 <a:cs typeface="Tiro Devanagari Hindi" pitchFamily="34" charset="-120"/>
               </a:rPr>
-              <a:t>फल</a:t>
+              <a:t>à¤«à¤²</a:t>
             </a:r>
             <a:endParaRPr lang="en-US" sz="3000" dirty="0"/>
           </a:p>
@@ -6012,7 +6012,7 @@
                 <a:ea typeface="Tiro Devanagari Hindi" pitchFamily="34" charset="-122"/>
                 <a:cs typeface="Tiro Devanagari Hindi" pitchFamily="34" charset="-120"/>
               </a:rPr>
-              <a:t>मोक्ष — मुक्ति</a:t>
+              <a:t>à¤®à¥‹à¤•à¥à¤· â€” à¤®à¥à¤•à¥à¤¤à¤¿</a:t>
             </a:r>
             <a:endParaRPr lang="en-US" sz="1300" dirty="0"/>
           </a:p>
@@ -6051,7 +6051,7 @@
                 <a:ea typeface="Cormorant Garamond" pitchFamily="34" charset="-122"/>
                 <a:cs typeface="Cormorant Garamond" pitchFamily="34" charset="-120"/>
               </a:rPr>
-              <a:t>BG 5.24–26 · 18.66</a:t>
+              <a:t>BG 5.24â€“26 Â· 18.66</a:t>
             </a:r>
             <a:endParaRPr lang="en-US" sz="950" dirty="0"/>
           </a:p>
@@ -6093,7 +6093,7 @@
                 <a:ea typeface="Tiro Devanagari Hindi" pitchFamily="34" charset="-122"/>
                 <a:cs typeface="Tiro Devanagari Hindi" pitchFamily="34" charset="-120"/>
               </a:rPr>
-              <a:t>संसार से छुटकारा और हरि की नित्य सन्निधि की प्राप्ति। मध्व के अनुसार: मोक्ष की क्रमिक श्रेणियाँ हैं (सालोक्य, सामीप्य, सारूप्य, सायुज्य)।</a:t>
+              <a:t>à¤¸à¤‚à¤¸à¤¾à¤° à¤¸à¥‡ à¤›à¥à¤Ÿà¤•à¤¾à¤°à¤¾ à¤”à¤° à¤¹à¤°à¤¿ à¤•à¥€ à¤¨à¤¿à¤¤à¥à¤¯ à¤¸à¤¨à¥à¤¨à¤¿à¤§à¤¿ à¤•à¥€ à¤ªà¥à¤°à¤¾à¤ªà¥à¤¤à¤¿à¥¤ à¤®à¤§à¥à¤µ à¤•à¥‡ à¤…à¤¨à¥à¤¸à¤¾à¤°: à¤®à¥‹à¤•à¥à¤· à¤•à¥€ à¤•à¥à¤°à¤®à¤¿à¤• à¤¶à¥à¤°à¥‡à¤£à¤¿à¤¯à¤¾à¤ à¤¹à¥ˆ…</a:t>
             </a:r>
             <a:endParaRPr lang="en-US" sz="1050" dirty="0"/>
           </a:p>
@@ -6182,7 +6182,7 @@
                 <a:ea typeface="Tiro Devanagari Hindi" pitchFamily="34" charset="-122"/>
                 <a:cs typeface="Tiro Devanagari Hindi" pitchFamily="34" charset="-120"/>
               </a:rPr>
-              <a:t>सर्व-धर्मान् परित्यज्य — शरण का फल</a:t>
+              <a:t>à¤¸à¤°à¥à¤µ-à¤§à¤°à¥à¤®à¤¾à¤¨à¥ à¤ªà¤°à¤¿à¤¤à¥à¤¯à¤œà¥à¤¯ â€” à¤¶à¤°à¤£ à¤•à¤¾ à¤«à¤²</a:t>
             </a:r>
             <a:endParaRPr lang="en-US" sz="1300" dirty="0"/>
           </a:p>
@@ -6263,7 +6263,7 @@
                 <a:ea typeface="Tiro Devanagari Hindi" pitchFamily="34" charset="-122"/>
                 <a:cs typeface="Tiro Devanagari Hindi" pitchFamily="34" charset="-120"/>
               </a:rPr>
-              <a:t>‘मैं तुझे सब पापों से छुड़ा दूँगा; शोक मत कर’ — गीता १८.६६ पर कृष्ण की प्रतिज्ञा। मध्व के लिए यह गीता का चूड़ांत-श्लोक है।</a:t>
+              <a:t>â€˜à¤®à¥ˆà¤‚ à¤¤à¥à¤à¥‡ à¤¸à¤¬ à¤ªà¤¾à¤ªà¥‹à¤‚ à¤¸à¥‡ à¤›à¥à¤¡à¤¼à¤¾ à¤¦à¥‚à¤à¤—à¤¾; à¤¶à¥‹à¤• à¤®à¤¤ à¤•à¤°â€™ â€” à¤—à¥€à¤¤à¤¾ à¥§à¥®.à¥¬à¥¬ à¤ªà¤° à¤•à¥ƒà¤·à¥à¤£ à¤•à¥€ à¤ªà¥à¤°à¤¤à¤¿à¤œà¥à¤žà¤¾à¥¤ à¤®à¤§à¥à¤µ à¤•à¥‡ à¤²à¤¿à¤ à¤¯à¤¹ à¤—à¥€à¤¤à¤¾ …</a:t>
             </a:r>
             <a:endParaRPr lang="en-US" sz="1050" dirty="0"/>
           </a:p>
@@ -6352,7 +6352,7 @@
                 <a:ea typeface="Tiro Devanagari Hindi" pitchFamily="34" charset="-122"/>
                 <a:cs typeface="Tiro Devanagari Hindi" pitchFamily="34" charset="-120"/>
               </a:rPr>
-              <a:t>सालोक्य — हरि के लोक में सहवास</a:t>
+              <a:t>à¤¸à¤¾à¤²à¥‹à¤•à¥à¤¯ â€” à¤¹à¤°à¤¿ à¤•à¥‡ à¤²à¥‹à¤• à¤®à¥‡à¤‚ à¤¸à¤¹à¤µà¤¾à¤¸</a:t>
             </a:r>
             <a:endParaRPr lang="en-US" sz="1300" dirty="0"/>
           </a:p>
@@ -6391,7 +6391,7 @@
                 <a:ea typeface="Cormorant Garamond" pitchFamily="34" charset="-122"/>
                 <a:cs typeface="Cormorant Garamond" pitchFamily="34" charset="-120"/>
               </a:rPr>
-              <a:t>BG 8.21 · 15.6</a:t>
+              <a:t>BG 8.21 Â· 15.6</a:t>
             </a:r>
             <a:endParaRPr lang="en-US" sz="950" dirty="0"/>
           </a:p>
@@ -6433,7 +6433,7 @@
                 <a:ea typeface="Tiro Devanagari Hindi" pitchFamily="34" charset="-122"/>
                 <a:cs typeface="Tiro Devanagari Hindi" pitchFamily="34" charset="-120"/>
               </a:rPr>
-              <a:t>मोक्ष की पहली श्रेणी: हरि के ही लोक (वैकुंठ) में निवास — पर अभी उनकी सन्निधि में नहीं।</a:t>
+              <a:t>à¤®à¥‹à¤•à¥à¤· à¤•à¥€ à¤ªà¤¹à¤²à¥€ à¤¶à¥à¤°à¥‡à¤£à¥€: à¤¹à¤°à¤¿ à¤•à¥‡ à¤¹à¥€ à¤²à¥‹à¤• (à¤µà¥ˆà¤•à¥à¤‚à¤ ) à¤®à¥‡à¤‚ à¤¨à¤¿à¤µà¤¾à¤¸ â€” à¤ªà¤° à¤…à¤­à¥€ à¤‰à¤¨à¤•à¥€ à¤¸à¤¨à¥à¤¨à¤¿à¤§à¤¿ à¤®à¥‡à¤‚ à¤¨à¤¹à¥€à¤‚à¥¤</a:t>
             </a:r>
             <a:endParaRPr lang="en-US" sz="1050" dirty="0"/>
           </a:p>
@@ -6522,7 +6522,7 @@
                 <a:ea typeface="Tiro Devanagari Hindi" pitchFamily="34" charset="-122"/>
                 <a:cs typeface="Tiro Devanagari Hindi" pitchFamily="34" charset="-120"/>
               </a:rPr>
-              <a:t>सामीप्य — हरि के समीप</a:t>
+              <a:t>à¤¸à¤¾à¤®à¥€à¤ªà¥à¤¯ â€” à¤¹à¤°à¤¿ à¤•à¥‡ à¤¸à¤®à¥€à¤ª</a:t>
             </a:r>
             <a:endParaRPr lang="en-US" sz="1300" dirty="0"/>
           </a:p>
@@ -6603,7 +6603,7 @@
                 <a:ea typeface="Tiro Devanagari Hindi" pitchFamily="34" charset="-122"/>
                 <a:cs typeface="Tiro Devanagari Hindi" pitchFamily="34" charset="-120"/>
               </a:rPr>
-              <a:t>दूसरी श्रेणी: हरि के अपने धाम में उनकी निकटता। सालोक्य से ऊपर, सारूप्य से नीचे।</a:t>
+              <a:t>à¤¦à¥‚à¤¸à¤°à¥€ à¤¶à¥à¤°à¥‡à¤£à¥€: à¤¹à¤°à¤¿ à¤•à¥‡ à¤…à¤ªà¤¨à¥‡ à¤§à¤¾à¤® à¤®à¥‡à¤‚ à¤‰à¤¨à¤•à¥€ à¤¨à¤¿à¤•à¤Ÿà¤¤à¤¾à¥¤ à¤¸à¤¾à¤²à¥‹à¤•à¥à¤¯ à¤¸à¥‡ à¤Šà¤ªà¤°, à¤¸à¤¾à¤°à¥‚à¤ªà¥à¤¯ à¤¸à¥‡ à¤¨à¥€à¤šà¥‡à¥¤</a:t>
             </a:r>
             <a:endParaRPr lang="en-US" sz="1050" dirty="0"/>
           </a:p>
@@ -6713,7 +6713,7 @@
                 <a:ea typeface="Tiro Devanagari Hindi" pitchFamily="34" charset="-122"/>
                 <a:cs typeface="Tiro Devanagari Hindi" pitchFamily="34" charset="-120"/>
               </a:rPr>
-              <a:t>यज्ञ</a:t>
+              <a:t>à¤¯à¤œà¥à¤ž</a:t>
             </a:r>
             <a:endParaRPr lang="en-US" sz="3000" dirty="0"/>
           </a:p>
@@ -6844,7 +6844,7 @@
                 <a:ea typeface="Tiro Devanagari Hindi" pitchFamily="34" charset="-122"/>
                 <a:cs typeface="Tiro Devanagari Hindi" pitchFamily="34" charset="-120"/>
               </a:rPr>
-              <a:t>द्रव्य-यज्ञ — वस्तु का यज्ञ</a:t>
+              <a:t>à¤¦à¥à¤°à¤µà¥à¤¯-à¤¯à¤œà¥à¤ž â€” à¤µà¤¸à¥à¤¤à¥ à¤•à¤¾ à¤¯à¤œà¥à¤ž</a:t>
             </a:r>
             <a:endParaRPr lang="en-US" sz="1300" dirty="0"/>
           </a:p>
@@ -6925,7 +6925,7 @@
                 <a:ea typeface="Tiro Devanagari Hindi" pitchFamily="34" charset="-122"/>
                 <a:cs typeface="Tiro Devanagari Hindi" pitchFamily="34" charset="-120"/>
               </a:rPr>
-              <a:t>भौतिक संपत्ति का अर्पण — कृष्ण की गीता ४.२८ की यज्ञ-सूची में पहला।</a:t>
+              <a:t>à¤­à¥Œà¤¤à¤¿à¤• à¤¸à¤‚à¤ªà¤¤à¥à¤¤à¤¿ à¤•à¤¾ à¤…à¤°à¥à¤ªà¤£ â€” à¤•à¥ƒà¤·à¥à¤£ à¤•à¥€ à¤—à¥€à¤¤à¤¾ à¥ª.à¥¨à¥® à¤•à¥€ à¤¯à¤œà¥à¤ž-à¤¸à¥‚à¤šà¥€ à¤®à¥‡à¤‚ à¤ªà¤¹à¤²à¤¾à¥¤</a:t>
             </a:r>
             <a:endParaRPr lang="en-US" sz="1050" dirty="0"/>
           </a:p>
@@ -7014,7 +7014,7 @@
                 <a:ea typeface="Tiro Devanagari Hindi" pitchFamily="34" charset="-122"/>
                 <a:cs typeface="Tiro Devanagari Hindi" pitchFamily="34" charset="-120"/>
               </a:rPr>
-              <a:t>तपो-यज्ञ — तप का यज्ञ</a:t>
+              <a:t>à¤¤à¤ªà¥‹-à¤¯à¤œà¥à¤ž â€” à¤¤à¤ª à¤•à¤¾ à¤¯à¤œà¥à¤ž</a:t>
             </a:r>
             <a:endParaRPr lang="en-US" sz="1300" dirty="0"/>
           </a:p>
@@ -7095,7 +7095,7 @@
                 <a:ea typeface="Tiro Devanagari Hindi" pitchFamily="34" charset="-122"/>
                 <a:cs typeface="Tiro Devanagari Hindi" pitchFamily="34" charset="-120"/>
               </a:rPr>
-              <a:t>अपने तप — शरीर, वाणी और मन का — को पूजा के रूप में अर्पण करना।</a:t>
+              <a:t>à¤…à¤ªà¤¨à¥‡ à¤¤à¤ª â€” à¤¶à¤°à¥€à¤°, à¤µà¤¾à¤£à¥€ à¤”à¤° à¤®à¤¨ à¤•à¤¾ â€” à¤•à¥‹ à¤ªà¥‚à¤œà¤¾ à¤•à¥‡ à¤°à¥‚à¤ª à¤®à¥‡à¤‚ à¤…à¤°à¥à¤ªà¤£ à¤•à¤°à¤¨à¤¾à¥¤</a:t>
             </a:r>
             <a:endParaRPr lang="en-US" sz="1050" dirty="0"/>
           </a:p>
@@ -7184,7 +7184,7 @@
                 <a:ea typeface="Tiro Devanagari Hindi" pitchFamily="34" charset="-122"/>
                 <a:cs typeface="Tiro Devanagari Hindi" pitchFamily="34" charset="-120"/>
               </a:rPr>
-              <a:t>योग-यज्ञ</a:t>
+              <a:t>à¤¯à¥‹à¤—-à¤¯à¤œà¥à¤ž</a:t>
             </a:r>
             <a:endParaRPr lang="en-US" sz="1300" dirty="0"/>
           </a:p>
@@ -7223,7 +7223,7 @@
                 <a:ea typeface="Cormorant Garamond" pitchFamily="34" charset="-122"/>
                 <a:cs typeface="Cormorant Garamond" pitchFamily="34" charset="-120"/>
               </a:rPr>
-              <a:t>BG 4.28–30</a:t>
+              <a:t>BG 4.28â€“30</a:t>
             </a:r>
             <a:endParaRPr lang="en-US" sz="950" dirty="0"/>
           </a:p>
@@ -7265,7 +7265,7 @@
                 <a:ea typeface="Tiro Devanagari Hindi" pitchFamily="34" charset="-122"/>
                 <a:cs typeface="Tiro Devanagari Hindi" pitchFamily="34" charset="-120"/>
               </a:rPr>
-              <a:t>अपनी योग-साधना — प्राण-अपान का संयम, अष्टांग योग — को हरि की उपासना के रूप में अर्पण करना।</a:t>
+              <a:t>à¤…à¤ªà¤¨à¥€ à¤¯à¥‹à¤—-à¤¸à¤¾à¤§à¤¨à¤¾ â€” à¤ªà¥à¤°à¤¾à¤£-à¤…à¤ªà¤¾à¤¨ à¤•à¤¾ à¤¸à¤‚à¤¯à¤®, à¤…à¤·à¥à¤Ÿà¤¾à¤‚à¤— à¤¯à¥‹à¤— â€” à¤•à¥‹ à¤¹à¤°à¤¿ à¤•à¥€ à¤‰à¤ªà¤¾à¤¸à¤¨à¤¾ à¤•à¥‡ à¤°à¥‚à¤ª à¤®à¥‡à¤‚ à¤…à¤°à¥à¤ªà¤£ à¤•à¤°à¤¨à¤¾à¥¤</a:t>
             </a:r>
             <a:endParaRPr lang="en-US" sz="1050" dirty="0"/>
           </a:p>
@@ -7354,7 +7354,7 @@
                 <a:ea typeface="Tiro Devanagari Hindi" pitchFamily="34" charset="-122"/>
                 <a:cs typeface="Tiro Devanagari Hindi" pitchFamily="34" charset="-120"/>
               </a:rPr>
-              <a:t>स्वाध्याय-यज्ञ</a:t>
+              <a:t>à¤¸à¥à¤µà¤¾à¤§à¥à¤¯à¤¾à¤¯-à¤¯à¤œà¥à¤ž</a:t>
             </a:r>
             <a:endParaRPr lang="en-US" sz="1300" dirty="0"/>
           </a:p>
@@ -7435,7 +7435,7 @@
                 <a:ea typeface="Tiro Devanagari Hindi" pitchFamily="34" charset="-122"/>
                 <a:cs typeface="Tiro Devanagari Hindi" pitchFamily="34" charset="-120"/>
               </a:rPr>
-              <a:t>शास्त्र-पाठ और उससे प्रकट होने वाला ज्ञान दोनों मिलकर — सर्वोच्च वाक्-यज्ञ।</a:t>
+              <a:t>à¤¶à¤¾à¤¸à¥à¤¤à¥à¤°-à¤ªà¤¾à¤  à¤”à¤° à¤‰à¤¸à¤¸à¥‡ à¤ªà¥à¤°à¤•à¤Ÿ à¤¹à¥‹à¤¨à¥‡ à¤µà¤¾à¤²à¤¾ à¤œà¥à¤žà¤¾à¤¨ à¤¦à¥‹à¤¨à¥‹à¤‚ à¤®à¤¿à¤²à¤•à¤° â€” à¤¸à¤°à¥à¤µà¥‹à¤šà¥à¤š à¤µà¤¾à¤•à¥-à¤¯à¤œà¥à¤žà¥¤</a:t>
             </a:r>
             <a:endParaRPr lang="en-US" sz="1050" dirty="0"/>
           </a:p>
@@ -7545,7 +7545,7 @@
                 <a:ea typeface="Tiro Devanagari Hindi" pitchFamily="34" charset="-122"/>
                 <a:cs typeface="Tiro Devanagari Hindi" pitchFamily="34" charset="-120"/>
               </a:rPr>
-              <a:t>प्रतीक</a:t>
+              <a:t>à¤ªà¥à¤°à¤¤à¥€à¤•</a:t>
             </a:r>
             <a:endParaRPr lang="en-US" sz="3000" dirty="0"/>
           </a:p>
@@ -7676,7 +7676,7 @@
                 <a:ea typeface="Tiro Devanagari Hindi" pitchFamily="34" charset="-122"/>
                 <a:cs typeface="Tiro Devanagari Hindi" pitchFamily="34" charset="-120"/>
               </a:rPr>
-              <a:t>अश्वत्थ — उल्टा पीपल</a:t>
+              <a:t>à¤…à¤¶à¥à¤µà¤¤à¥à¤¥ â€” à¤‰à¤²à¥à¤Ÿà¤¾ à¤ªà¥€à¤ªà¤²</a:t>
             </a:r>
             <a:endParaRPr lang="en-US" sz="1300" dirty="0"/>
           </a:p>
@@ -7715,7 +7715,7 @@
                 <a:ea typeface="Cormorant Garamond" pitchFamily="34" charset="-122"/>
                 <a:cs typeface="Cormorant Garamond" pitchFamily="34" charset="-120"/>
               </a:rPr>
-              <a:t>BG 15.1–3</a:t>
+              <a:t>BG 15.1â€“3</a:t>
             </a:r>
             <a:endParaRPr lang="en-US" sz="950" dirty="0"/>
           </a:p>
@@ -7757,7 +7757,7 @@
                 <a:ea typeface="Tiro Devanagari Hindi" pitchFamily="34" charset="-122"/>
                 <a:cs typeface="Tiro Devanagari Hindi" pitchFamily="34" charset="-120"/>
               </a:rPr>
-              <a:t>जड़ें ऊपर (हरि), शाखाएँ नीचे (लोक); गुणों से पोषित, इंद्रिय-विषयों के पत्ते उगाता। इसे अनासक्ति के कुठार से काटो।</a:t>
+              <a:t>à¤œà¤¡à¤¼à¥‡à¤‚ à¤Šà¤ªà¤° (à¤¹à¤°à¤¿), à¤¶à¤¾à¤–à¤¾à¤à¤ à¤¨à¥€à¤šà¥‡ (à¤²à¥‹à¤•); à¤—à¥à¤£à¥‹à¤‚ à¤¸à¥‡ à¤ªà¥‹à¤·à¤¿à¤¤, à¤‡à¤‚à¤¦à¥à¤°à¤¿à¤¯-à¤µà¤¿à¤·à¤¯à¥‹à¤‚ à¤•à¥‡ à¤ªà¤¤à¥à¤¤à¥‡ à¤‰à¤—à¤¾à¤¤à¤¾à¥¤ à¤‡à¤¸à¥‡ à¤…à¤¨à¤¾à¤¸à¤•à¥à¤¤à¤¿ à¤•à¥‡ à¤•à¥à¤ …</a:t>
             </a:r>
             <a:endParaRPr lang="en-US" sz="1050" dirty="0"/>
           </a:p>
@@ -7846,7 +7846,7 @@
                 <a:ea typeface="Tiro Devanagari Hindi" pitchFamily="34" charset="-122"/>
                 <a:cs typeface="Tiro Devanagari Hindi" pitchFamily="34" charset="-120"/>
               </a:rPr>
-              <a:t>रथ-रूपक — रथ का दृष्टांत</a:t>
+              <a:t>à¤°à¤¥-à¤°à¥‚à¤ªà¤• â€” à¤°à¤¥ à¤•à¤¾ à¤¦à¥ƒà¤·à¥à¤Ÿà¤¾à¤‚à¤¤</a:t>
             </a:r>
             <a:endParaRPr lang="en-US" sz="1300" dirty="0"/>
           </a:p>
@@ -7885,7 +7885,7 @@
                 <a:ea typeface="Cormorant Garamond" pitchFamily="34" charset="-122"/>
                 <a:cs typeface="Cormorant Garamond" pitchFamily="34" charset="-120"/>
               </a:rPr>
-              <a:t>BG 1.21–25 · 18.78</a:t>
+              <a:t>BG 1.21â€“25 Â· 18.78</a:t>
             </a:r>
             <a:endParaRPr lang="en-US" sz="950" dirty="0"/>
           </a:p>
@@ -7927,7 +7927,7 @@
                 <a:ea typeface="Tiro Devanagari Hindi" pitchFamily="34" charset="-122"/>
                 <a:cs typeface="Tiro Devanagari Hindi" pitchFamily="34" charset="-120"/>
               </a:rPr>
-              <a:t>गीता के १–२ अध्याय में अनुक्त रूप से उपस्थित: कृष्ण सारथी, अर्जुन रथी। कठ उपनिषद् के रथ-रूपक की प्रतिध्वनि।</a:t>
+              <a:t>à¤—à¥€à¤¤à¤¾ à¤•à¥‡ à¥§â€“à¥¨ à¤…à¤§à¥à¤¯à¤¾à¤¯ à¤®à¥‡à¤‚ à¤…à¤¨à¥à¤•à¥à¤¤ à¤°à¥‚à¤ª à¤¸à¥‡ à¤‰à¤ªà¤¸à¥à¤¥à¤¿à¤¤: à¤•à¥ƒà¤·à¥à¤£ à¤¸à¤¾à¤°à¤¥à¥€, à¤…à¤°à¥à¤œà¥à¤¨ à¤°à¤¥à¥€à¥¤ à¤•à¤  à¤‰à¤ªà¤¨à¤¿à¤·à¤¦à¥ à¤•à¥‡ à¤°à¤¥-à¤°à¥‚à¤ªà¤• à¤•à¥€ à¤ªà¥à¤°à¤¤…</a:t>
             </a:r>
             <a:endParaRPr lang="en-US" sz="1050" dirty="0"/>
           </a:p>
@@ -8016,7 +8016,7 @@
                 <a:ea typeface="Tiro Devanagari Hindi" pitchFamily="34" charset="-122"/>
                 <a:cs typeface="Tiro Devanagari Hindi" pitchFamily="34" charset="-120"/>
               </a:rPr>
-              <a:t>प्रणव ओम्</a:t>
+              <a:t>à¤ªà¥à¤°à¤£à¤µ à¤“à¤®à¥</a:t>
             </a:r>
             <a:endParaRPr lang="en-US" sz="1300" dirty="0"/>
           </a:p>
@@ -8055,7 +8055,7 @@
                 <a:ea typeface="Cormorant Garamond" pitchFamily="34" charset="-122"/>
                 <a:cs typeface="Cormorant Garamond" pitchFamily="34" charset="-120"/>
               </a:rPr>
-              <a:t>BG 8.13 · 17.23</a:t>
+              <a:t>BG 8.13 Â· 17.23</a:t>
             </a:r>
             <a:endParaRPr lang="en-US" sz="950" dirty="0"/>
           </a:p>
@@ -8097,7 +8097,7 @@
                 <a:ea typeface="Tiro Devanagari Hindi" pitchFamily="34" charset="-122"/>
                 <a:cs typeface="Tiro Devanagari Hindi" pitchFamily="34" charset="-120"/>
               </a:rPr>
-              <a:t>‘ओम् इत्येकाक्षरं ब्रह्म’ — मृत्यु के क्षण में ‘ओम्’ का उच्चारण और हरि का स्मरण करने वाला परम पद को पाता है।</a:t>
+              <a:t>â€˜à¤“à¤®à¥ à¤‡à¤¤à¥à¤¯à¥‡à¤•à¤¾à¤•à¥à¤·à¤°à¤‚ à¤¬à¥à¤°à¤¹à¥à¤®â€™ â€” à¤®à¥ƒà¤¤à¥à¤¯à¥ à¤•à¥‡ à¤•à¥à¤·à¤£ à¤®à¥‡à¤‚ â€˜à¤“à¤®à¥â€™ à¤•à¤¾ à¤‰à¤šà¥à¤šà¤¾à¤°à¤£ à¤”à¤° à¤¹à¤°à¤¿ à¤•à¤¾ à¤¸à¥à¤®à¤°à¤£ à¤•à¤°à¤¨à¥‡ à¤µà¤¾à¤²à¤¾ à¤ªà¤°à¤® à¤ªà¤¦ à¤•à¥…</a:t>
             </a:r>
             <a:endParaRPr lang="en-US" sz="1050" dirty="0"/>
           </a:p>
@@ -8186,7 +8186,7 @@
                 <a:ea typeface="Tiro Devanagari Hindi" pitchFamily="34" charset="-122"/>
                 <a:cs typeface="Tiro Devanagari Hindi" pitchFamily="34" charset="-120"/>
               </a:rPr>
-              <a:t>अक्षरों में अ</a:t>
+              <a:t>à¤…à¤•à¥à¤·à¤°à¥‹à¤‚ à¤®à¥‡à¤‚ à¤…</a:t>
             </a:r>
             <a:endParaRPr lang="en-US" sz="1300" dirty="0"/>
           </a:p>
@@ -8267,7 +8267,7 @@
                 <a:ea typeface="Tiro Devanagari Hindi" pitchFamily="34" charset="-122"/>
                 <a:cs typeface="Tiro Devanagari Hindi" pitchFamily="34" charset="-120"/>
               </a:rPr>
-              <a:t>‘अक्षरों में मैं अ हूँ’ — सब वर्णों का स्रोत; समासों में द्वंद्व सबसे श्रेष्ठ।</a:t>
+              <a:t>â€˜à¤…à¤•à¥à¤·à¤°à¥‹à¤‚ à¤®à¥‡à¤‚ à¤®à¥ˆà¤‚ à¤… à¤¹à¥‚à¤â€™ â€” à¤¸à¤¬ à¤µà¤°à¥à¤£à¥‹à¤‚ à¤•à¤¾ à¤¸à¥à¤°à¥‹à¤¤; à¤¸à¤®à¤¾à¤¸à¥‹à¤‚ à¤®à¥‡à¤‚ à¤¦à¥à¤µà¤‚à¤¦à¥à¤µ à¤¸à¤¬à¤¸à¥‡ à¤¶à¥à¤°à¥‡à¤·à¥à¤ à¥¤</a:t>
             </a:r>
             <a:endParaRPr lang="en-US" sz="1050" dirty="0"/>
           </a:p>
@@ -9144,7 +9144,7 @@
                 <a:ea typeface="Tiro Devanagari Hindi" pitchFamily="34" charset="-122"/>
                 <a:cs typeface="Tiro Devanagari Hindi" pitchFamily="34" charset="-120"/>
               </a:rPr>
-              <a:t>परमार्थ</a:t>
+              <a:t>à¤ªà¤°à¤®à¤¾à¤°à¥à¤¥</a:t>
             </a:r>
             <a:endParaRPr lang="en-US" sz="800" dirty="0"/>
           </a:p>
@@ -9433,7 +9433,7 @@
                 <a:ea typeface="Tiro Devanagari Hindi" pitchFamily="34" charset="-122"/>
                 <a:cs typeface="Tiro Devanagari Hindi" pitchFamily="34" charset="-120"/>
               </a:rPr>
-              <a:t>तत्त्व</a:t>
+              <a:t>à¤¤à¤¤à¥à¤¤à¥à¤µ</a:t>
             </a:r>
             <a:endParaRPr lang="en-US" sz="800" dirty="0"/>
           </a:p>
@@ -9672,7 +9672,7 @@
                 <a:ea typeface="Tiro Devanagari Hindi" pitchFamily="34" charset="-122"/>
                 <a:cs typeface="Tiro Devanagari Hindi" pitchFamily="34" charset="-120"/>
               </a:rPr>
-              <a:t>क्षेत्र-क्षेत्रज्ञ</a:t>
+              <a:t>à¤•à¥à¤·à¥‡à¤¤à¥à¤°-à¤•à¥à¤·à¥‡à¤¤à¥à¤°à¤œà¥à¤ž</a:t>
             </a:r>
             <a:endParaRPr lang="en-US" sz="800" dirty="0"/>
           </a:p>
@@ -9911,7 +9911,7 @@
                 <a:ea typeface="Tiro Devanagari Hindi" pitchFamily="34" charset="-122"/>
                 <a:cs typeface="Tiro Devanagari Hindi" pitchFamily="34" charset="-120"/>
               </a:rPr>
-              <a:t>गुण</a:t>
+              <a:t>à¤—à¥à¤£</a:t>
             </a:r>
             <a:endParaRPr lang="en-US" sz="800" dirty="0"/>
           </a:p>
@@ -10200,7 +10200,7 @@
                 <a:ea typeface="Tiro Devanagari Hindi" pitchFamily="34" charset="-122"/>
                 <a:cs typeface="Tiro Devanagari Hindi" pitchFamily="34" charset="-120"/>
               </a:rPr>
-              <a:t>योग</a:t>
+              <a:t>à¤¯à¥‹à¤—</a:t>
             </a:r>
             <a:endParaRPr lang="en-US" sz="800" dirty="0"/>
           </a:p>
@@ -10464,7 +10464,7 @@
                 <a:ea typeface="Tiro Devanagari Hindi" pitchFamily="34" charset="-122"/>
                 <a:cs typeface="Tiro Devanagari Hindi" pitchFamily="34" charset="-120"/>
               </a:rPr>
-              <a:t>साधना</a:t>
+              <a:t>à¤¸à¤¾à¤§à¤¨à¤¾</a:t>
             </a:r>
             <a:endParaRPr lang="en-US" sz="800" dirty="0"/>
           </a:p>
@@ -10753,7 +10753,7 @@
                 <a:ea typeface="Tiro Devanagari Hindi" pitchFamily="34" charset="-122"/>
                 <a:cs typeface="Tiro Devanagari Hindi" pitchFamily="34" charset="-120"/>
               </a:rPr>
-              <a:t>अंतःकरण</a:t>
+              <a:t>à¤…à¤‚à¤¤à¤ƒà¤•à¤°à¤£</a:t>
             </a:r>
             <a:endParaRPr lang="en-US" sz="800" dirty="0"/>
           </a:p>
@@ -10942,7 +10942,7 @@
                 <a:ea typeface="Tiro Devanagari Hindi" pitchFamily="34" charset="-122"/>
                 <a:cs typeface="Tiro Devanagari Hindi" pitchFamily="34" charset="-120"/>
               </a:rPr>
-              <a:t>धर्म</a:t>
+              <a:t>à¤§à¤°à¥à¤®</a:t>
             </a:r>
             <a:endParaRPr lang="en-US" sz="800" dirty="0"/>
           </a:p>
@@ -11206,7 +11206,7 @@
                 <a:ea typeface="Tiro Devanagari Hindi" pitchFamily="34" charset="-122"/>
                 <a:cs typeface="Tiro Devanagari Hindi" pitchFamily="34" charset="-120"/>
               </a:rPr>
-              <a:t>दोष</a:t>
+              <a:t>à¤¦à¥‹à¤·</a:t>
             </a:r>
             <a:endParaRPr lang="en-US" sz="800" dirty="0"/>
           </a:p>
@@ -11445,7 +11445,7 @@
                 <a:ea typeface="Tiro Devanagari Hindi" pitchFamily="34" charset="-122"/>
                 <a:cs typeface="Tiro Devanagari Hindi" pitchFamily="34" charset="-120"/>
               </a:rPr>
-              <a:t>फल</a:t>
+              <a:t>à¤«à¤²</a:t>
             </a:r>
             <a:endParaRPr lang="en-US" sz="800" dirty="0"/>
           </a:p>
@@ -11734,7 +11734,7 @@
                 <a:ea typeface="Tiro Devanagari Hindi" pitchFamily="34" charset="-122"/>
                 <a:cs typeface="Tiro Devanagari Hindi" pitchFamily="34" charset="-120"/>
               </a:rPr>
-              <a:t>यज्ञ</a:t>
+              <a:t>à¤¯à¤œà¥à¤ž</a:t>
             </a:r>
             <a:endParaRPr lang="en-US" sz="800" dirty="0"/>
           </a:p>
@@ -11923,7 +11923,7 @@
                 <a:ea typeface="Tiro Devanagari Hindi" pitchFamily="34" charset="-122"/>
                 <a:cs typeface="Tiro Devanagari Hindi" pitchFamily="34" charset="-120"/>
               </a:rPr>
-              <a:t>प्रतीक</a:t>
+              <a:t>à¤ªà¥à¤°à¤¤à¥€à¤•</a:t>
             </a:r>
             <a:endParaRPr lang="en-US" sz="800" dirty="0"/>
           </a:p>
@@ -12183,7 +12183,7 @@
                 <a:ea typeface="Tiro Devanagari Hindi" pitchFamily="34" charset="-122"/>
                 <a:cs typeface="Tiro Devanagari Hindi" pitchFamily="34" charset="-120"/>
               </a:rPr>
-              <a:t>हरि की पूर्ण सर्वोच्चता</a:t>
+              <a:t>à¤¹à¤°à¤¿ à¤•à¥€ à¤ªà¥‚à¤°à¥à¤£ à¤¸à¤°à¥à¤µà¥‹à¤šà¥à¤šà¤¤à¤¾</a:t>
             </a:r>
             <a:endParaRPr lang="en-US" sz="3000" dirty="0"/>
           </a:p>
@@ -12225,7 +12225,7 @@
                 <a:ea typeface="Tiro Devanagari Hindi" pitchFamily="34" charset="-122"/>
                 <a:cs typeface="Tiro Devanagari Hindi" pitchFamily="34" charset="-120"/>
               </a:rPr>
-              <a:t>तारतम्य की मूल धुरी: हरि सर्वोच्च हैं, उनके बराबर या उनसे ऊपर कोई नहीं। बाकी सब उन पर निर्भर।</a:t>
+              <a:t>à¤¤à¤¾à¤°à¤¤à¤®à¥à¤¯ à¤•à¥€ à¤®à¥‚à¤² à¤§à¥à¤°à¥€: à¤¹à¤°à¤¿ à¤¸à¤°à¥à¤µà¥‹à¤šà¥à¤š à¤¹à¥ˆà¤‚, à¤‰à¤¨à¤•à¥‡ à¤¬à¤°à¤¾à¤¬à¤° à¤¯à¤¾ à¤‰à¤¨à¤¸à¥‡ à¤Šà¤ªà¤° à¤•à¥‹à¤ˆ à¤¨à¤¹à¥€à¤‚à¥¤ à¤¬à¤¾à¤•à¥€ à¤¸à¤¬ à¤‰à¤¨ à¤ªà¤° à¤¨à¤¿à¤°à¥à¤­à¤°à¥¤</a:t>
             </a:r>
             <a:endParaRPr lang="en-US" sz="1300" dirty="0"/>
           </a:p>
@@ -12267,7 +12267,7 @@
                 <a:ea typeface="Tiro Devanagari Hindi" pitchFamily="34" charset="-122"/>
                 <a:cs typeface="Tiro Devanagari Hindi" pitchFamily="34" charset="-120"/>
               </a:rPr>
-              <a:t>मध्व-सिद्धांत की नींव — पंचभेद यहीं से शुरू होता है।</a:t>
+              <a:t>à¤®à¤§à¥à¤µ-à¤¸à¤¿à¤¦à¥à¤§à¤¾à¤‚à¤¤ à¤•à¥€ à¤¨à¥€à¤‚à¤µ â€” à¤ªà¤‚à¤šà¤­à¥‡à¤¦ à¤¯à¤¹à¥€à¤‚ à¤¸à¥‡ à¤¶à¥à¤°à¥‚ à¤¹à¥‹à¤¤à¤¾ à¤¹à¥ˆà¥¤</a:t>
             </a:r>
             <a:endParaRPr lang="en-US" sz="1300" dirty="0"/>
           </a:p>
@@ -12437,7 +12437,7 @@
                 <a:ea typeface="Tiro Devanagari Hindi" pitchFamily="34" charset="-122"/>
                 <a:cs typeface="Tiro Devanagari Hindi" pitchFamily="34" charset="-120"/>
               </a:rPr>
-              <a:t>मत्तः परतरं नान्यत्किञ्चिदस्ति धनञ्जय।</a:t>
+              <a:t>à¤®à¤¤à¥à¤¤à¤ƒ à¤ªà¤°à¤¤à¤°à¤‚ à¤¨à¤¾à¤¨à¥à¤¯à¤¤à¥à¤•à¤¿à¤žà¥à¤šà¤¿à¤¦à¤¸à¥à¤¤à¤¿ à¤§à¤¨à¤žà¥à¤œà¤¯à¥¤</a:t>
             </a:r>
             <a:endParaRPr lang="en-US" sz="1200" dirty="0"/>
           </a:p>
@@ -12476,7 +12476,7 @@
                 <a:ea typeface="Cormorant Garamond" pitchFamily="34" charset="-122"/>
                 <a:cs typeface="Cormorant Garamond" pitchFamily="34" charset="-120"/>
               </a:rPr>
-              <a:t>BG 7.7 · 11.43 · 18.65</a:t>
+              <a:t>BG 7.7 Â· 11.43 Â· 18.65</a:t>
             </a:r>
             <a:endParaRPr lang="en-US" sz="1000" dirty="0"/>
           </a:p>
@@ -12586,7 +12586,7 @@
                 <a:ea typeface="Tiro Devanagari Hindi" pitchFamily="34" charset="-122"/>
                 <a:cs typeface="Tiro Devanagari Hindi" pitchFamily="34" charset="-120"/>
               </a:rPr>
-              <a:t>पाँच असली भेद</a:t>
+              <a:t>à¤ªà¤¾à¤à¤š à¤…à¤¸à¤²à¥€ à¤­à¥‡à¤¦</a:t>
             </a:r>
             <a:endParaRPr lang="en-US" sz="3000" dirty="0"/>
           </a:p>
@@ -12628,7 +12628,7 @@
                 <a:ea typeface="Tiro Devanagari Hindi" pitchFamily="34" charset="-122"/>
                 <a:cs typeface="Tiro Devanagari Hindi" pitchFamily="34" charset="-120"/>
               </a:rPr>
-              <a:t>हरि-जीव, हरि-जड़, जीव-जड़, जीव-जीव, जड़-जड़ — पाँच नित्य भेद, जिन्हें मध्व-सिद्धांत वैचारिक सत्य के रूप में स्थापित करता है।</a:t>
+              <a:t>à¤¹à¤°à¤¿-à¤œà¥€à¤µ, à¤¹à¤°à¤¿-à¤œà¤¡à¤¼, à¤œà¥€à¤µ-à¤œà¤¡à¤¼, à¤œà¥€à¤µ-à¤œà¥€à¤µ, à¤œà¤¡à¤¼-à¤œà¤¡à¤¼ â€” à¤ªà¤¾à¤à¤š à¤¨à¤¿à¤¤à¥à¤¯ à¤­à¥‡à¤¦, à¤œà¤¿à¤¨à¥à¤¹à¥‡à¤‚ à¤®à¤§à¥à¤µ-à¤¸à¤¿à¤¦à¥à¤§à¤¾à¤‚à¤¤ à¤µà¥ˆà¤šà¤¾à¤°à¤¿à¤• à¤¸à¤¤à¥à¤¯ à¤•à¥‡ à¤°à¥‚à¤ª à¤®à¥‡à¤‚ à¤¸à¥à¤¥à¤¾à¤ªà¤¿à¤¤ à¤•à¤°à¤¤à¤¾ à¤¹à¥ˆà¥¤</a:t>
             </a:r>
             <a:endParaRPr lang="en-US" sz="1300" dirty="0"/>
           </a:p>
@@ -12670,7 +12670,7 @@
                 <a:ea typeface="Tiro Devanagari Hindi" pitchFamily="34" charset="-122"/>
                 <a:cs typeface="Tiro Devanagari Hindi" pitchFamily="34" charset="-120"/>
               </a:rPr>
-              <a:t>मध्व-परिभाषा-सूत्र। हर भेद गीता में निहित है (जीव १५.७; जीव-जीव-भेद १८.४१ के स्वभाव-वर्णन में)।</a:t>
+              <a:t>à¤®à¤§à¥à¤µ-à¤ªà¤°à¤¿à¤­à¤¾à¤·à¤¾-à¤¸à¥‚à¤¤à¥à¤°à¥¤ à¤¹à¤° à¤­à¥‡à¤¦ à¤—à¥€à¤¤à¤¾ à¤®à¥‡à¤‚ à¤¨à¤¿à¤¹à¤¿à¤¤ à¤¹à¥ˆ (à¤œà¥€à¤µ à¥§à¥«.à¥­; à¤œà¥€à¤µ-à¤œà¥€à¤µ-à¤­à¥‡à¤¦ à¥§à¥®.à¥ªà¥§ à¤•à¥‡ à¤¸à¥à¤µà¤­à¤¾à¤µ-à¤µà¤°à¥à¤£à¤¨ à¤®à¥‡à¤‚)à¥¤</a:t>
             </a:r>
             <a:endParaRPr lang="en-US" sz="1300" dirty="0"/>
           </a:p>
@@ -12840,7 +12840,7 @@
                 <a:ea typeface="Tiro Devanagari Hindi" pitchFamily="34" charset="-122"/>
                 <a:cs typeface="Tiro Devanagari Hindi" pitchFamily="34" charset="-120"/>
               </a:rPr>
-              <a:t>ममैवांशो जीवलोके जीवभूतः सनातनः।</a:t>
+              <a:t>à¤®à¤®à¥ˆà¤µà¤¾à¤‚à¤¶à¥‹ à¤œà¥€à¤µà¤²à¥‹à¤•à¥‡ à¤œà¥€à¤µà¤­à¥‚à¤¤à¤ƒ à¤¸à¤¨à¤¾à¤¤à¤¨à¤ƒà¥¤</a:t>
             </a:r>
             <a:endParaRPr lang="en-US" sz="1200" dirty="0"/>
           </a:p>
@@ -12879,7 +12879,7 @@
                 <a:ea typeface="Cormorant Garamond" pitchFamily="34" charset="-122"/>
                 <a:cs typeface="Cormorant Garamond" pitchFamily="34" charset="-120"/>
               </a:rPr>
-              <a:t>BG 7.4–5 · 15.7 · 15.16–18</a:t>
+              <a:t>BG 7.4â€“5 Â· 15.7 Â· 15.16â€“18</a:t>
             </a:r>
             <a:endParaRPr lang="en-US" sz="1000" dirty="0"/>
           </a:p>
@@ -13141,7 +13141,7 @@
                 <a:ea typeface="Tiro Devanagari Hindi" pitchFamily="34" charset="-122"/>
                 <a:cs typeface="Tiro Devanagari Hindi" pitchFamily="34" charset="-120"/>
               </a:rPr>
-              <a:t>सत्ता की क्रमिकता</a:t>
+              <a:t>à¤¸à¤¤à¥à¤¤à¤¾ à¤•à¥€ à¤•à¥à¤°à¤®à¤¿à¤•à¤¤à¤¾</a:t>
             </a:r>
             <a:endParaRPr lang="en-US" sz="3000" dirty="0"/>
           </a:p>
@@ -13183,7 +13183,7 @@
                 <a:ea typeface="Tiro Devanagari Hindi" pitchFamily="34" charset="-122"/>
                 <a:cs typeface="Tiro Devanagari Hindi" pitchFamily="34" charset="-120"/>
               </a:rPr>
-              <a:t>हरि के अधीन समस्त सत्ता का सख्त क्रम — हर आत्मा का एक निश्चित, अपरिवर्तनीय स्थान। मध्व-तत्त्वशास्त्र का स्थापत्य सिद्धांत।</a:t>
+              <a:t>à¤¹à¤°à¤¿ à¤•à¥‡ à¤…à¤§à¥€à¤¨ à¤¸à¤®à¤¸à¥à¤¤ à¤¸à¤¤à¥à¤¤à¤¾ à¤•à¤¾ à¤¸à¤–à¥à¤¤ à¤•à¥à¤°à¤® â€” à¤¹à¤° à¤†à¤¤à¥à¤®à¤¾ à¤•à¤¾ à¤à¤• à¤¨à¤¿à¤¶à¥à¤šà¤¿à¤¤, à¤…à¤ªà¤°à¤¿à¤µà¤°à¥à¤¤à¤¨à¥€à¤¯ à¤¸à¥à¤¥à¤¾à¤¨à¥¤ à¤®à¤§à¥à¤µ-à¤¤à¤¤à¥à¤¤à¥à¤µà¤¶à¤¾à¤¸à¥à¤¤à¥à¤° à¤•à¤¾ à¤¸à¥à¤¥à¤¾à¤ªà¤¤à¥à¤¯ à¤¸à¤¿à¤¦à¥à¤§à¤¾à¤‚à¤¤à¥¤</a:t>
             </a:r>
             <a:endParaRPr lang="en-US" sz="1300" dirty="0"/>
           </a:p>
@@ -13225,7 +13225,7 @@
                 <a:ea typeface="Tiro Devanagari Hindi" pitchFamily="34" charset="-122"/>
                 <a:cs typeface="Tiro Devanagari Hindi" pitchFamily="34" charset="-120"/>
               </a:rPr>
-              <a:t>विशेष रूप से मध्व का। पंचभेद और मुक्ति की श्रेणियों का आधार।</a:t>
+              <a:t>à¤µà¤¿à¤¶à¥‡à¤· à¤°à¥‚à¤ª à¤¸à¥‡ à¤®à¤§à¥à¤µ à¤•à¤¾à¥¤ à¤ªà¤‚à¤šà¤­à¥‡à¤¦ à¤”à¤° à¤®à¥à¤•à¥à¤¤à¤¿ à¤•à¥€ à¤¶à¥à¤°à¥‡à¤£à¤¿à¤¯à¥‹à¤‚ à¤•à¤¾ à¤†à¤§à¤¾à¤°à¥¤</a:t>
             </a:r>
             <a:endParaRPr lang="en-US" sz="1300" dirty="0"/>
           </a:p>
@@ -13395,7 +13395,7 @@
                 <a:ea typeface="Tiro Devanagari Hindi" pitchFamily="34" charset="-122"/>
                 <a:cs typeface="Tiro Devanagari Hindi" pitchFamily="34" charset="-120"/>
               </a:rPr>
-              <a:t>मत्तः परतरं नान्यत्किञ्चिदस्ति धनञ्जय।</a:t>
+              <a:t>à¤®à¤¤à¥à¤¤à¤ƒ à¤ªà¤°à¤¤à¤°à¤‚ à¤¨à¤¾à¤¨à¥à¤¯à¤¤à¥à¤•à¤¿à¤žà¥à¤šà¤¿à¤¦à¤¸à¥à¤¤à¤¿ à¤§à¤¨à¤žà¥à¤œà¤¯à¥¤</a:t>
             </a:r>
             <a:endParaRPr lang="en-US" sz="1200" dirty="0"/>
           </a:p>
@@ -13415,7 +13415,7 @@
                 <a:ea typeface="Tiro Devanagari Hindi" pitchFamily="34" charset="-122"/>
                 <a:cs typeface="Tiro Devanagari Hindi" pitchFamily="34" charset="-120"/>
               </a:rPr>
-              <a:t>मयि सर्वमिदं प्रोतं सूत्रे मणिगणा इव॥</a:t>
+              <a:t>à¤®à¤¯à¤¿ à¤¸à¤°à¥à¤µà¤®à¤¿à¤¦à¤‚ à¤ªà¥à¤°à¥‹à¤¤à¤‚ à¤¸à¥‚à¤¤à¥à¤°à¥‡ à¤®à¤£à¤¿à¤—à¤£à¤¾ à¤‡à¤µà¥¥</a:t>
             </a:r>
             <a:endParaRPr lang="en-US" sz="1200" dirty="0"/>
           </a:p>
@@ -13454,7 +13454,7 @@
                 <a:ea typeface="Cormorant Garamond" pitchFamily="34" charset="-122"/>
                 <a:cs typeface="Cormorant Garamond" pitchFamily="34" charset="-120"/>
               </a:rPr>
-              <a:t>BG 7.7 · 15.16–18</a:t>
+              <a:t>BG 7.7 Â· 15.16â€“18</a:t>
             </a:r>
             <a:endParaRPr lang="en-US" sz="1000" dirty="0"/>
           </a:p>
@@ -13564,7 +13564,7 @@
                 <a:ea typeface="Tiro Devanagari Hindi" pitchFamily="34" charset="-122"/>
                 <a:cs typeface="Tiro Devanagari Hindi" pitchFamily="34" charset="-120"/>
               </a:rPr>
-              <a:t>सर्व-धर्मान् परित्यज्य — शरण का फल</a:t>
+              <a:t>à¤¸à¤°à¥à¤µ-à¤§à¤°à¥à¤®à¤¾à¤¨à¥ à¤ªà¤°à¤¿à¤¤à¥à¤¯à¤œà¥à¤¯ â€” à¤¶à¤°à¤£ à¤•à¤¾ à¤«à¤²</a:t>
             </a:r>
             <a:endParaRPr lang="en-US" sz="3000" dirty="0"/>
           </a:p>
@@ -13606,7 +13606,7 @@
                 <a:ea typeface="Tiro Devanagari Hindi" pitchFamily="34" charset="-122"/>
                 <a:cs typeface="Tiro Devanagari Hindi" pitchFamily="34" charset="-120"/>
               </a:rPr>
-              <a:t>‘मैं तुझे सब पापों से छुड़ा दूँगा; शोक मत कर’ — गीता १८.६६ पर कृष्ण की प्रतिज्ञा। मध्व के लिए यह गीता का चूड़ांत-श्लोक है।</a:t>
+              <a:t>â€˜à¤®à¥ˆà¤‚ à¤¤à¥à¤à¥‡ à¤¸à¤¬ à¤ªà¤¾à¤ªà¥‹à¤‚ à¤¸à¥‡ à¤›à¥à¤¡à¤¼à¤¾ à¤¦à¥‚à¤à¤—à¤¾; à¤¶à¥‹à¤• à¤®à¤¤ à¤•à¤°â€™ â€” à¤—à¥€à¤¤à¤¾ à¥§à¥®.à¥¬à¥¬ à¤ªà¤° à¤•à¥ƒà¤·à¥à¤£ à¤•à¥€ à¤ªà¥à¤°à¤¤à¤¿à¤œà¥à¤žà¤¾à¥¤ à¤®à¤§à¥à¤µ à¤•à¥‡ à¤²à¤¿à¤ à¤¯à¤¹ à¤—à¥€à¤¤à¤¾ à¤•à¤¾ à¤šà¥‚à¤¡à¤¼à¤¾à¤‚à¤¤-à¤¶à¥à¤²à¥‹à¤• à¤¹à¥ˆà¥¤</a:t>
             </a:r>
             <a:endParaRPr lang="en-US" sz="1300" dirty="0"/>
           </a:p>
@@ -13648,7 +13648,7 @@
                 <a:ea typeface="Tiro Devanagari Hindi" pitchFamily="34" charset="-122"/>
                 <a:cs typeface="Tiro Devanagari Hindi" pitchFamily="34" charset="-120"/>
               </a:rPr>
-              <a:t>चरम-श्लोक — मध्व-परंपरा का सबसे केंद्रीय श्लोक, स्वयं हरि की प्रत्यक्ष प्रतिज्ञा।</a:t>
+              <a:t>à¤šà¤°à¤®-à¤¶à¥à¤²à¥‹à¤• â€” à¤®à¤§à¥à¤µ-à¤ªà¤°à¤‚à¤ªà¤°à¤¾ à¤•à¤¾ à¤¸à¤¬à¤¸à¥‡ à¤•à¥‡à¤‚à¤¦à¥à¤°à¥€à¤¯ à¤¶à¥à¤²à¥‹à¤•, à¤¸à¥à¤µà¤¯à¤‚ à¤¹à¤°à¤¿ à¤•à¥€ à¤ªà¥à¤°à¤¤à¥à¤¯à¤•à¥à¤· à¤ªà¥à¤°à¤¤à¤¿à¤œà¥à¤žà¤¾à¥¤</a:t>
             </a:r>
             <a:endParaRPr lang="en-US" sz="1300" dirty="0"/>
           </a:p>
@@ -13818,7 +13818,7 @@
                 <a:ea typeface="Tiro Devanagari Hindi" pitchFamily="34" charset="-122"/>
                 <a:cs typeface="Tiro Devanagari Hindi" pitchFamily="34" charset="-120"/>
               </a:rPr>
-              <a:t>सर्वधर्मान्परित्यज्य मामेकं शरणं व्रज।</a:t>
+              <a:t>à¤¸à¤°à¥à¤µà¤§à¤°à¥à¤®à¤¾à¤¨à¥à¤ªà¤°à¤¿à¤¤à¥à¤¯à¤œà¥à¤¯ à¤®à¤¾à¤®à¥‡à¤•à¤‚ à¤¶à¤°à¤£à¤‚ à¤µà¥à¤°à¤œà¥¤</a:t>
             </a:r>
             <a:endParaRPr lang="en-US" sz="1200" dirty="0"/>
           </a:p>
@@ -13838,7 +13838,7 @@
                 <a:ea typeface="Tiro Devanagari Hindi" pitchFamily="34" charset="-122"/>
                 <a:cs typeface="Tiro Devanagari Hindi" pitchFamily="34" charset="-120"/>
               </a:rPr>
-              <a:t>अहं त्वा सर्वपापेभ्यो मोक्षयिष्यामि मा शुचः॥</a:t>
+              <a:t>à¤…à¤¹à¤‚ à¤¤à¥à¤µà¤¾ à¤¸à¤°à¥à¤µà¤ªà¤¾à¤ªà¥‡à¤­à¥à¤¯à¥‹ à¤®à¥‹à¤•à¥à¤·à¤¯à¤¿à¤·à¥à¤¯à¤¾à¤®à¤¿ à¤®à¤¾ à¤¶à¥à¤šà¤ƒà¥¥</a:t>
             </a:r>
             <a:endParaRPr lang="en-US" sz="1200" dirty="0"/>
           </a:p>
@@ -13987,7 +13987,7 @@
                 <a:ea typeface="Tiro Devanagari Hindi" pitchFamily="34" charset="-122"/>
                 <a:cs typeface="Tiro Devanagari Hindi" pitchFamily="34" charset="-120"/>
               </a:rPr>
-              <a:t>जीव — देहधारी आत्मा</a:t>
+              <a:t>à¤œà¥€à¤µ â€” à¤¦à¥‡à¤¹à¤§à¤¾à¤°à¥€ à¤†à¤¤à¥à¤®à¤¾</a:t>
             </a:r>
             <a:endParaRPr lang="en-US" sz="3000" dirty="0"/>
           </a:p>
@@ -14029,7 +14029,7 @@
                 <a:ea typeface="Tiro Devanagari Hindi" pitchFamily="34" charset="-122"/>
                 <a:cs typeface="Tiro Devanagari Hindi" pitchFamily="34" charset="-120"/>
               </a:rPr>
-              <a:t>हरि का नित्य अंश (गीता १५.७) — असली, अलग, अनेक, ब्रह्म में कभी विलीन नहीं। अविद्या से बँधा रहता है, मुक्ति तक।</a:t>
+              <a:t>à¤¹à¤°à¤¿ à¤•à¤¾ à¤¨à¤¿à¤¤à¥à¤¯ à¤…à¤‚à¤¶ (à¤—à¥€à¤¤à¤¾ à¥§à¥«.à¥­) â€” à¤…à¤¸à¤²à¥€, à¤…à¤²à¤—, à¤…à¤¨à¥‡à¤•, à¤¬à¥à¤°à¤¹à¥à¤® à¤®à¥‡à¤‚ à¤•à¤­à¥€ à¤µà¤¿à¤²à¥€à¤¨ à¤¨à¤¹à¥€à¤‚à¥¤ à¤…à¤µà¤¿à¤¦à¥à¤¯à¤¾ à¤¸à¥‡ à¤¬à¤à¤§à¤¾ à¤°à¤¹à¤¤à¤¾ à¤¹à¥ˆ, à¤®à¥à¤•à¥à¤¤à¤¿ à¤¤à¤•à¥¤</a:t>
             </a:r>
             <a:endParaRPr lang="en-US" sz="1300" dirty="0"/>
           </a:p>
@@ -14071,7 +14071,7 @@
                 <a:ea typeface="Tiro Devanagari Hindi" pitchFamily="34" charset="-122"/>
                 <a:cs typeface="Tiro Devanagari Hindi" pitchFamily="34" charset="-120"/>
               </a:rPr>
-              <a:t>जीव-भेद वास्तविक है (पंचभेद का पहला)। जीवों की बहुलता नित्य है।</a:t>
+              <a:t>à¤œà¥€à¤µ-à¤­à¥‡à¤¦ à¤µà¤¾à¤¸à¥à¤¤à¤µà¤¿à¤• à¤¹à¥ˆ (à¤ªà¤‚à¤šà¤­à¥‡à¤¦ à¤•à¤¾ à¤ªà¤¹à¤²à¤¾)à¥¤ à¤œà¥€à¤µà¥‹à¤‚ à¤•à¥€ à¤¬à¤¹à¥à¤²à¤¤à¤¾ à¤¨à¤¿à¤¤à¥à¤¯ à¤¹à¥ˆà¥¤</a:t>
             </a:r>
             <a:endParaRPr lang="en-US" sz="1300" dirty="0"/>
           </a:p>
@@ -14241,7 +14241,7 @@
                 <a:ea typeface="Tiro Devanagari Hindi" pitchFamily="34" charset="-122"/>
                 <a:cs typeface="Tiro Devanagari Hindi" pitchFamily="34" charset="-120"/>
               </a:rPr>
-              <a:t>ममैवांशो जीवलोके जीवभूतः सनातनः।</a:t>
+              <a:t>à¤®à¤®à¥ˆà¤µà¤¾à¤‚à¤¶à¥‹ à¤œà¥€à¤µà¤²à¥‹à¤•à¥‡ à¤œà¥€à¤µà¤­à¥‚à¤¤à¤ƒ à¤¸à¤¨à¤¾à¤¤à¤¨à¤ƒà¥¤</a:t>
             </a:r>
             <a:endParaRPr lang="en-US" sz="1200" dirty="0"/>
           </a:p>
@@ -14261,7 +14261,7 @@
                 <a:ea typeface="Tiro Devanagari Hindi" pitchFamily="34" charset="-122"/>
                 <a:cs typeface="Tiro Devanagari Hindi" pitchFamily="34" charset="-120"/>
               </a:rPr>
-              <a:t>मनःषष्ठानीन्द्रियाणि प्रकृतिस्थानि कर्षति॥</a:t>
+              <a:t>à¤®à¤¨à¤ƒà¤·à¤·à¥à¤ à¤¾à¤¨à¥€à¤¨à¥à¤¦à¥à¤°à¤¿à¤¯à¤¾à¤£à¤¿ à¤ªà¥à¤°à¤•à¥ƒà¤¤à¤¿à¤¸à¥à¤¥à¤¾à¤¨à¤¿ à¤•à¤°à¥à¤·à¤¤à¤¿à¥¥</a:t>
             </a:r>
             <a:endParaRPr lang="en-US" sz="1200" dirty="0"/>
           </a:p>
@@ -15026,7 +15026,7 @@
                 <a:ea typeface="Cormorant Garamond" pitchFamily="34" charset="-122"/>
                 <a:cs typeface="Cormorant Garamond" pitchFamily="34" charset="-120"/>
               </a:rPr>
-              <a:t>124</a:t>
+              <a:t>241</a:t>
             </a:r>
             <a:endParaRPr lang="en-US" sz="6000" dirty="0"/>
           </a:p>
@@ -15232,7 +15232,7 @@
                 <a:ea typeface="Cormorant Garamond" pitchFamily="34" charset="-122"/>
                 <a:cs typeface="Cormorant Garamond" pitchFamily="34" charset="-120"/>
               </a:rPr>
-              <a:t>112</a:t>
+              <a:t>124</a:t>
             </a:r>
             <a:endParaRPr lang="en-US" sz="6000" dirty="0"/>
           </a:p>
@@ -15700,7 +15700,7 @@
                 <a:ea typeface="Tiro Devanagari Hindi" pitchFamily="34" charset="-122"/>
                 <a:cs typeface="Tiro Devanagari Hindi" pitchFamily="34" charset="-120"/>
               </a:rPr>
-              <a:t>परमार्थ</a:t>
+              <a:t>à¤ªà¤°à¤®à¤¾à¤°à¥à¤¥</a:t>
             </a:r>
             <a:endParaRPr lang="en-US" sz="1300" dirty="0"/>
           </a:p>
@@ -15739,7 +15739,7 @@
                 <a:ea typeface="Cormorant Garamond" pitchFamily="34" charset="-122"/>
                 <a:cs typeface="Cormorant Garamond" pitchFamily="34" charset="-120"/>
               </a:rPr>
-              <a:t>Ultimate reality — Hari, the sarvottama</a:t>
+              <a:t>Ultimate reality â€” Hari, the sarvottama</a:t>
             </a:r>
             <a:endParaRPr lang="en-US" sz="1100" dirty="0"/>
           </a:p>
@@ -15803,7 +15803,7 @@
                 <a:ea typeface="Tiro Devanagari Hindi" pitchFamily="34" charset="-122"/>
                 <a:cs typeface="Tiro Devanagari Hindi" pitchFamily="34" charset="-120"/>
               </a:rPr>
-              <a:t>तत्त्व</a:t>
+              <a:t>à¤¤à¤¤à¥à¤¤à¥à¤µ</a:t>
             </a:r>
             <a:endParaRPr lang="en-US" sz="1300" dirty="0"/>
           </a:p>
@@ -15842,7 +15842,7 @@
                 <a:ea typeface="Cormorant Garamond" pitchFamily="34" charset="-122"/>
                 <a:cs typeface="Cormorant Garamond" pitchFamily="34" charset="-120"/>
               </a:rPr>
-              <a:t>Metaphysical categories — jīva, prakṛti, kāla</a:t>
+              <a:t>Metaphysical categories â€” jÄ«va, praká¹›ti, kÄla</a:t>
             </a:r>
             <a:endParaRPr lang="en-US" sz="1100" dirty="0"/>
           </a:p>
@@ -15906,7 +15906,7 @@
                 <a:ea typeface="Tiro Devanagari Hindi" pitchFamily="34" charset="-122"/>
                 <a:cs typeface="Tiro Devanagari Hindi" pitchFamily="34" charset="-120"/>
               </a:rPr>
-              <a:t>क्षेत्र-क्षेत्रज्ञ</a:t>
+              <a:t>à¤•à¥à¤·à¥‡à¤¤à¥à¤°-à¤•à¥à¤·à¥‡à¤¤à¥à¤°à¤œà¥à¤ž</a:t>
             </a:r>
             <a:endParaRPr lang="en-US" sz="1300" dirty="0"/>
           </a:p>
@@ -15945,7 +15945,7 @@
                 <a:ea typeface="Cormorant Garamond" pitchFamily="34" charset="-122"/>
                 <a:cs typeface="Cormorant Garamond" pitchFamily="34" charset="-120"/>
               </a:rPr>
-              <a:t>Field &amp; field-knower — body, knower, 24 elements (Ch 13)</a:t>
+              <a:t>Field &amp; field-knower â€” body, knower, 24 elements (Ch 13)</a:t>
             </a:r>
             <a:endParaRPr lang="en-US" sz="1100" dirty="0"/>
           </a:p>
@@ -16009,7 +16009,7 @@
                 <a:ea typeface="Tiro Devanagari Hindi" pitchFamily="34" charset="-122"/>
                 <a:cs typeface="Tiro Devanagari Hindi" pitchFamily="34" charset="-120"/>
               </a:rPr>
-              <a:t>गुण</a:t>
+              <a:t>à¤—à¥à¤£</a:t>
             </a:r>
             <a:endParaRPr lang="en-US" sz="1300" dirty="0"/>
           </a:p>
@@ -16048,7 +16048,7 @@
                 <a:ea typeface="Cormorant Garamond" pitchFamily="34" charset="-122"/>
                 <a:cs typeface="Cormorant Garamond" pitchFamily="34" charset="-120"/>
               </a:rPr>
-              <a:t>The three modes of prakṛti — sattva, rajas, tamas</a:t>
+              <a:t>The three modes of praká¹›ti â€” sattva, rajas, tamas</a:t>
             </a:r>
             <a:endParaRPr lang="en-US" sz="1100" dirty="0"/>
           </a:p>
@@ -16112,7 +16112,7 @@
                 <a:ea typeface="Tiro Devanagari Hindi" pitchFamily="34" charset="-122"/>
                 <a:cs typeface="Tiro Devanagari Hindi" pitchFamily="34" charset="-120"/>
               </a:rPr>
-              <a:t>योग</a:t>
+              <a:t>à¤¯à¥‹à¤—</a:t>
             </a:r>
             <a:endParaRPr lang="en-US" sz="1300" dirty="0"/>
           </a:p>
@@ -16151,7 +16151,7 @@
                 <a:ea typeface="Cormorant Garamond" pitchFamily="34" charset="-122"/>
                 <a:cs typeface="Cormorant Garamond" pitchFamily="34" charset="-120"/>
               </a:rPr>
-              <a:t>Paths — karma, jñāna, bhakti, dhyāna, sannyāsa</a:t>
+              <a:t>Paths â€” karma, jÃ±Äna, bhakti, dhyÄna, sannyÄsa</a:t>
             </a:r>
             <a:endParaRPr lang="en-US" sz="1100" dirty="0"/>
           </a:p>
@@ -16215,7 +16215,7 @@
                 <a:ea typeface="Tiro Devanagari Hindi" pitchFamily="34" charset="-122"/>
                 <a:cs typeface="Tiro Devanagari Hindi" pitchFamily="34" charset="-120"/>
               </a:rPr>
-              <a:t>साधना</a:t>
+              <a:t>à¤¸à¤¾à¤§à¤¨à¤¾</a:t>
             </a:r>
             <a:endParaRPr lang="en-US" sz="1300" dirty="0"/>
           </a:p>
@@ -16254,7 +16254,7 @@
                 <a:ea typeface="Cormorant Garamond" pitchFamily="34" charset="-122"/>
                 <a:cs typeface="Cormorant Garamond" pitchFamily="34" charset="-120"/>
               </a:rPr>
-              <a:t>Practices — śraddhā, vairāgya, yajña, tapas, tyāga</a:t>
+              <a:t>Practices â€” Å›raddhÄ, vairÄgya, yajÃ±a, tapas, tyÄga</a:t>
             </a:r>
             <a:endParaRPr lang="en-US" sz="1100" dirty="0"/>
           </a:p>
@@ -16318,7 +16318,7 @@
                 <a:ea typeface="Tiro Devanagari Hindi" pitchFamily="34" charset="-122"/>
                 <a:cs typeface="Tiro Devanagari Hindi" pitchFamily="34" charset="-120"/>
               </a:rPr>
-              <a:t>अंतःकरण</a:t>
+              <a:t>à¤…à¤‚à¤¤à¤ƒà¤•à¤°à¤£</a:t>
             </a:r>
             <a:endParaRPr lang="en-US" sz="1300" dirty="0"/>
           </a:p>
@@ -16357,7 +16357,7 @@
                 <a:ea typeface="Cormorant Garamond" pitchFamily="34" charset="-122"/>
                 <a:cs typeface="Cormorant Garamond" pitchFamily="34" charset="-120"/>
               </a:rPr>
-              <a:t>Inner instrument — manas, buddhi, ahaṅkāra, indriyas</a:t>
+              <a:t>Inner instrument â€” manas, buddhi, ahaá¹…kÄra, indriyas</a:t>
             </a:r>
             <a:endParaRPr lang="en-US" sz="1100" dirty="0"/>
           </a:p>
@@ -16421,7 +16421,7 @@
                 <a:ea typeface="Tiro Devanagari Hindi" pitchFamily="34" charset="-122"/>
                 <a:cs typeface="Tiro Devanagari Hindi" pitchFamily="34" charset="-120"/>
               </a:rPr>
-              <a:t>धर्म</a:t>
+              <a:t>à¤§à¤°à¥à¤®</a:t>
             </a:r>
             <a:endParaRPr lang="en-US" sz="1300" dirty="0"/>
           </a:p>
@@ -16460,7 +16460,7 @@
                 <a:ea typeface="Cormorant Garamond" pitchFamily="34" charset="-122"/>
                 <a:cs typeface="Cormorant Garamond" pitchFamily="34" charset="-120"/>
               </a:rPr>
-              <a:t>Ethics — svadharma, niṣkāma-karma, sthita-prajña</a:t>
+              <a:t>Ethics â€” svadharma, niá¹£kÄma-karma, sthita-prajÃ±a</a:t>
             </a:r>
             <a:endParaRPr lang="en-US" sz="1100" dirty="0"/>
           </a:p>
@@ -16524,7 +16524,7 @@
                 <a:ea typeface="Tiro Devanagari Hindi" pitchFamily="34" charset="-122"/>
                 <a:cs typeface="Tiro Devanagari Hindi" pitchFamily="34" charset="-120"/>
               </a:rPr>
-              <a:t>दोष</a:t>
+              <a:t>à¤¦à¥‹à¤·</a:t>
             </a:r>
             <a:endParaRPr lang="en-US" sz="1300" dirty="0"/>
           </a:p>
@@ -16563,7 +16563,7 @@
                 <a:ea typeface="Cormorant Garamond" pitchFamily="34" charset="-122"/>
                 <a:cs typeface="Cormorant Garamond" pitchFamily="34" charset="-120"/>
               </a:rPr>
-              <a:t>Defects — kāma, krodha, lobha, moha, asat-saṅga</a:t>
+              <a:t>Defects â€” kÄma, krodha, lobha, moha, asat-saá¹…ga</a:t>
             </a:r>
             <a:endParaRPr lang="en-US" sz="1100" dirty="0"/>
           </a:p>
@@ -16627,7 +16627,7 @@
                 <a:ea typeface="Tiro Devanagari Hindi" pitchFamily="34" charset="-122"/>
                 <a:cs typeface="Tiro Devanagari Hindi" pitchFamily="34" charset="-120"/>
               </a:rPr>
-              <a:t>फल</a:t>
+              <a:t>à¤«à¤²</a:t>
             </a:r>
             <a:endParaRPr lang="en-US" sz="1300" dirty="0"/>
           </a:p>
@@ -16666,7 +16666,7 @@
                 <a:ea typeface="Cormorant Garamond" pitchFamily="34" charset="-122"/>
                 <a:cs typeface="Cormorant Garamond" pitchFamily="34" charset="-120"/>
               </a:rPr>
-              <a:t>Goals &amp; states — mokṣa, paramagati, brāhmī-sthiti</a:t>
+              <a:t>Goals &amp; states â€” moká¹£a, paramagati, brÄhmÄ«-sthiti</a:t>
             </a:r>
             <a:endParaRPr lang="en-US" sz="1100" dirty="0"/>
           </a:p>
@@ -16730,7 +16730,7 @@
                 <a:ea typeface="Tiro Devanagari Hindi" pitchFamily="34" charset="-122"/>
                 <a:cs typeface="Tiro Devanagari Hindi" pitchFamily="34" charset="-120"/>
               </a:rPr>
-              <a:t>यज्ञ</a:t>
+              <a:t>à¤¯à¤œà¥à¤ž</a:t>
             </a:r>
             <a:endParaRPr lang="en-US" sz="1300" dirty="0"/>
           </a:p>
@@ -16769,7 +16769,7 @@
                 <a:ea typeface="Cormorant Garamond" pitchFamily="34" charset="-122"/>
                 <a:cs typeface="Cormorant Garamond" pitchFamily="34" charset="-120"/>
               </a:rPr>
-              <a:t>Sacrifice varieties — dravya, tapo, jñāna, svādhyāya</a:t>
+              <a:t>Sacrifice varieties â€” dravya, tapo, jÃ±Äna, svÄdhyÄya</a:t>
             </a:r>
             <a:endParaRPr lang="en-US" sz="1100" dirty="0"/>
           </a:p>
@@ -16833,7 +16833,7 @@
                 <a:ea typeface="Tiro Devanagari Hindi" pitchFamily="34" charset="-122"/>
                 <a:cs typeface="Tiro Devanagari Hindi" pitchFamily="34" charset="-120"/>
               </a:rPr>
-              <a:t>प्रतीक</a:t>
+              <a:t>à¤ªà¥à¤°à¤¤à¥€à¤•</a:t>
             </a:r>
             <a:endParaRPr lang="en-US" sz="1300" dirty="0"/>
           </a:p>
@@ -16872,7 +16872,7 @@
                 <a:ea typeface="Cormorant Garamond" pitchFamily="34" charset="-122"/>
                 <a:cs typeface="Cormorant Garamond" pitchFamily="34" charset="-120"/>
               </a:rPr>
-              <a:t>Symbols &amp; metaphors — aśvattha, ratha, praṇava</a:t>
+              <a:t>Symbols &amp; metaphors â€” aÅ›vattha, ratha, praá¹‡ava</a:t>
             </a:r>
             <a:endParaRPr lang="en-US" sz="1100" dirty="0"/>
           </a:p>
@@ -16982,7 +16982,7 @@
                 <a:ea typeface="Tiro Devanagari Hindi" pitchFamily="34" charset="-122"/>
                 <a:cs typeface="Tiro Devanagari Hindi" pitchFamily="34" charset="-120"/>
               </a:rPr>
-              <a:t>परमार्थ</a:t>
+              <a:t>à¤ªà¤°à¤®à¤¾à¤°à¥à¤¥</a:t>
             </a:r>
             <a:endParaRPr lang="en-US" sz="3000" dirty="0"/>
           </a:p>
@@ -17113,7 +17113,7 @@
                 <a:ea typeface="Tiro Devanagari Hindi" pitchFamily="34" charset="-122"/>
                 <a:cs typeface="Tiro Devanagari Hindi" pitchFamily="34" charset="-120"/>
               </a:rPr>
-              <a:t>ब्रह्म — परम तत्त्व</a:t>
+              <a:t>à¤¬à¥à¤°à¤¹à¥à¤® â€” à¤ªà¤°à¤® à¤¤à¤¤à¥à¤¤à¥à¤µ</a:t>
             </a:r>
             <a:endParaRPr lang="en-US" sz="1300" dirty="0"/>
           </a:p>
@@ -17152,7 +17152,7 @@
                 <a:ea typeface="Cormorant Garamond" pitchFamily="34" charset="-122"/>
                 <a:cs typeface="Cormorant Garamond" pitchFamily="34" charset="-120"/>
               </a:rPr>
-              <a:t>BG 8.3 · 14.27 · 15.18</a:t>
+              <a:t>BG 8.3 Â· 14.27 Â· 15.18</a:t>
             </a:r>
             <a:endParaRPr lang="en-US" sz="950" dirty="0"/>
           </a:p>
@@ -17194,7 +17194,7 @@
                 <a:ea typeface="Tiro Devanagari Hindi" pitchFamily="34" charset="-122"/>
                 <a:cs typeface="Tiro Devanagari Hindi" pitchFamily="34" charset="-120"/>
               </a:rPr>
-              <a:t>मध्व-सिद्धांत में 'ब्रह्म' शब्द केवल विष्णु/नारायण का नाम है — सर्वोत्तम, क्षर और अक्षर से परे पुरुषोत्तम। यह कोई सामान्य 'निरपेक्ष तत्त्व' नहीं है।</a:t>
+              <a:t>à¤®à¤§à¥à¤µ-à¤¸à¤¿à¤¦à¥à¤§à¤¾à¤‚à¤¤ à¤®à¥‡à¤‚ 'à¤¬à¥à¤°à¤¹à¥à¤®' à¤¶à¤¬à¥à¤¦ à¤•à¥‡à¤µà¤² à¤µà¤¿à¤·à¥à¤£à¥/à¤¨à¤¾à¤°à¤¾à¤¯à¤£ à¤•à¤¾ à¤¨à¤¾à¤® à¤¹à¥ˆ â€” à¤¸à¤°à¥à¤µà¥‹à¤¤à¥à¤¤à¤®, à¤•à¥à¤·à¤° à¤”à¤° à¤…à¤•à¥à¤·à¤° à¤¸à¥‡ à¤ªà¤°à¥‡ à¤ªà¥à¤°à¥à¤·…</a:t>
             </a:r>
             <a:endParaRPr lang="en-US" sz="1050" dirty="0"/>
           </a:p>
@@ -17283,7 +17283,7 @@
                 <a:ea typeface="Tiro Devanagari Hindi" pitchFamily="34" charset="-122"/>
                 <a:cs typeface="Tiro Devanagari Hindi" pitchFamily="34" charset="-120"/>
               </a:rPr>
-              <a:t>परमात्मा — अंतर्यामी</a:t>
+              <a:t>à¤ªà¤°à¤®à¤¾à¤¤à¥à¤®à¤¾ â€” à¤…à¤‚à¤¤à¤°à¥à¤¯à¤¾à¤®à¥€</a:t>
             </a:r>
             <a:endParaRPr lang="en-US" sz="1300" dirty="0"/>
           </a:p>
@@ -17322,7 +17322,7 @@
                 <a:ea typeface="Cormorant Garamond" pitchFamily="34" charset="-122"/>
                 <a:cs typeface="Cormorant Garamond" pitchFamily="34" charset="-120"/>
               </a:rPr>
-              <a:t>BG 13.22 · 15.17</a:t>
+              <a:t>BG 13.22 Â· 15.17</a:t>
             </a:r>
             <a:endParaRPr lang="en-US" sz="950" dirty="0"/>
           </a:p>
@@ -17364,7 +17364,7 @@
                 <a:ea typeface="Tiro Devanagari Hindi" pitchFamily="34" charset="-122"/>
                 <a:cs typeface="Tiro Devanagari Hindi" pitchFamily="34" charset="-120"/>
               </a:rPr>
-              <a:t>'परम आत्मा' — हर शरीर में साक्षी, भर्ता और नियामक के रूप में स्थित। जीव से अत्यंत भिन्न (गीता १५.१७)।</a:t>
+              <a:t>'à¤ªà¤°à¤® à¤†à¤¤à¥à¤®à¤¾' â€” à¤¹à¤° à¤¶à¤°à¥€à¤° à¤®à¥‡à¤‚ à¤¸à¤¾à¤•à¥à¤·à¥€, à¤­à¤°à¥à¤¤à¤¾ à¤”à¤° à¤¨à¤¿à¤¯à¤¾à¤®à¤• à¤•à¥‡ à¤°à¥‚à¤ª à¤®à¥‡à¤‚ à¤¸à¥à¤¥à¤¿à¤¤à¥¤ à¤œà¥€à¤µ à¤¸à¥‡ à¤…à¤¤à¥à¤¯à¤‚à¤¤ à¤­à¤¿à¤¨à¥à¤¨ (à¤—à¥€à¤¤à¤¾ à¥§à¥«.à¥§à¥­)à¥¤</a:t>
             </a:r>
             <a:endParaRPr lang="en-US" sz="1050" dirty="0"/>
           </a:p>
@@ -17453,7 +17453,7 @@
                 <a:ea typeface="Tiro Devanagari Hindi" pitchFamily="34" charset="-122"/>
                 <a:cs typeface="Tiro Devanagari Hindi" pitchFamily="34" charset="-120"/>
               </a:rPr>
-              <a:t>पुरुषोत्तम — सर्वोच्च पुरुष</a:t>
+              <a:t>à¤ªà¥à¤°à¥à¤·à¥‹à¤¤à¥à¤¤à¤® â€” à¤¸à¤°à¥à¤µà¥‹à¤šà¥à¤š à¤ªà¥à¤°à¥à¤·</a:t>
             </a:r>
             <a:endParaRPr lang="en-US" sz="1300" dirty="0"/>
           </a:p>
@@ -17492,7 +17492,7 @@
                 <a:ea typeface="Cormorant Garamond" pitchFamily="34" charset="-122"/>
                 <a:cs typeface="Cormorant Garamond" pitchFamily="34" charset="-120"/>
               </a:rPr>
-              <a:t>BG 15.18–19</a:t>
+              <a:t>BG 15.18â€“19</a:t>
             </a:r>
             <a:endParaRPr lang="en-US" sz="950" dirty="0"/>
           </a:p>
@@ -17534,7 +17534,7 @@
                 <a:ea typeface="Tiro Devanagari Hindi" pitchFamily="34" charset="-122"/>
                 <a:cs typeface="Tiro Devanagari Hindi" pitchFamily="34" charset="-120"/>
               </a:rPr>
-              <a:t>कृष्ण का स्वयं को क्षर और अक्षर दोनों से परे ‘पुरुषोत्तम’ कहना — पंद्रहवें अध्याय का सार बिंदु।</a:t>
+              <a:t>à¤•à¥ƒà¤·à¥à¤£ à¤•à¤¾ à¤¸à¥à¤µà¤¯à¤‚ à¤•à¥‹ à¤•à¥à¤·à¤° à¤”à¤° à¤…à¤•à¥à¤·à¤° à¤¦à¥‹à¤¨à¥‹à¤‚ à¤¸à¥‡ à¤ªà¤°à¥‡ â€˜à¤ªà¥à¤°à¥à¤·à¥‹à¤¤à¥à¤¤à¤®â€™ à¤•à¤¹à¤¨à¤¾ â€” à¤ªà¤‚à¤¦à¥à¤°à¤¹à¤µà¥‡à¤‚ à¤…à¤§à¥à¤¯à¤¾à¤¯ à¤•à¤¾ à¤¸à¤¾à¤° à¤¬à¤¿à¤‚à¤¦à¥à¥¤</a:t>
             </a:r>
             <a:endParaRPr lang="en-US" sz="1050" dirty="0"/>
           </a:p>
@@ -17623,7 +17623,7 @@
                 <a:ea typeface="Tiro Devanagari Hindi" pitchFamily="34" charset="-122"/>
                 <a:cs typeface="Tiro Devanagari Hindi" pitchFamily="34" charset="-120"/>
               </a:rPr>
-              <a:t>अक्षर पुरुष — कूटस्थ</a:t>
+              <a:t>à¤…à¤•à¥à¤·à¤° à¤ªà¥à¤°à¥à¤· â€” à¤•à¥‚à¤Ÿà¤¸à¥à¤¥</a:t>
             </a:r>
             <a:endParaRPr lang="en-US" sz="1300" dirty="0"/>
           </a:p>
@@ -17704,7 +17704,7 @@
                 <a:ea typeface="Tiro Devanagari Hindi" pitchFamily="34" charset="-122"/>
                 <a:cs typeface="Tiro Devanagari Hindi" pitchFamily="34" charset="-120"/>
               </a:rPr>
-              <a:t>कूटस्थ अक्षर — मध्व के अनुसार यह लक्ष्मी हैं, नित्य-मुक्त जीवों की मुख्या। हरि के बाद सर्वोत्तम।</a:t>
+              <a:t>à¤•à¥‚à¤Ÿà¤¸à¥à¤¥ à¤…à¤•à¥à¤·à¤° â€” à¤®à¤§à¥à¤µ à¤•à¥‡ à¤…à¤¨à¥à¤¸à¤¾à¤° à¤¯à¤¹ à¤²à¤•à¥à¤·à¥à¤®à¥€ à¤¹à¥ˆà¤‚, à¤¨à¤¿à¤¤à¥à¤¯-à¤®à¥à¤•à¥à¤¤ à¤œà¥€à¤µà¥‹à¤‚ à¤•à¥€ à¤®à¥à¤–à¥à¤¯à¤¾à¥¤ à¤¹à¤°à¤¿ à¤•à¥‡ à¤¬à¤¾à¤¦ à¤¸à¤°à¥à¤µà¥‹à¤¤à¥à¤¤à¤®à¥¤</a:t>
             </a:r>
             <a:endParaRPr lang="en-US" sz="1050" dirty="0"/>
           </a:p>
@@ -17814,7 +17814,7 @@
                 <a:ea typeface="Tiro Devanagari Hindi" pitchFamily="34" charset="-122"/>
                 <a:cs typeface="Tiro Devanagari Hindi" pitchFamily="34" charset="-120"/>
               </a:rPr>
-              <a:t>तत्त्व</a:t>
+              <a:t>à¤¤à¤¤à¥à¤¤à¥à¤µ</a:t>
             </a:r>
             <a:endParaRPr lang="en-US" sz="3000" dirty="0"/>
           </a:p>
@@ -17945,7 +17945,7 @@
                 <a:ea typeface="Tiro Devanagari Hindi" pitchFamily="34" charset="-122"/>
                 <a:cs typeface="Tiro Devanagari Hindi" pitchFamily="34" charset="-120"/>
               </a:rPr>
-              <a:t>जीव — देहधारी आत्मा</a:t>
+              <a:t>à¤œà¥€à¤µ â€” à¤¦à¥‡à¤¹à¤§à¤¾à¤°à¥€ à¤†à¤¤à¥à¤®à¤¾</a:t>
             </a:r>
             <a:endParaRPr lang="en-US" sz="1300" dirty="0"/>
           </a:p>
@@ -18026,7 +18026,7 @@
                 <a:ea typeface="Tiro Devanagari Hindi" pitchFamily="34" charset="-122"/>
                 <a:cs typeface="Tiro Devanagari Hindi" pitchFamily="34" charset="-120"/>
               </a:rPr>
-              <a:t>हरि का नित्य अंश (गीता १५.७) — असली, अलग, अनेक, ब्रह्म में कभी विलीन नहीं। अविद्या से बँधा रहता है, मुक्ति तक।</a:t>
+              <a:t>à¤¹à¤°à¤¿ à¤•à¤¾ à¤¨à¤¿à¤¤à¥à¤¯ à¤…à¤‚à¤¶ (à¤—à¥€à¤¤à¤¾ à¥§à¥«.à¥­) â€” à¤…à¤¸à¤²à¥€, à¤…à¤²à¤—, à¤…à¤¨à¥‡à¤•, à¤¬à¥à¤°à¤¹à¥à¤® à¤®à¥‡à¤‚ à¤•à¤­à¥€ à¤µà¤¿à¤²à¥€à¤¨ à¤¨à¤¹à¥€à¤‚à¥¤ à¤…à¤µà¤¿à¤¦à¥à¤¯à¤¾ à¤¸à¥‡ à¤¬à¤à¤§à¤¾ à¤°à¤¹à¤¤à¤¾ à¤¹à¥ˆ, à¤®à¥à¤•à¥…</a:t>
             </a:r>
             <a:endParaRPr lang="en-US" sz="1050" dirty="0"/>
           </a:p>
@@ -18115,7 +18115,7 @@
                 <a:ea typeface="Tiro Devanagari Hindi" pitchFamily="34" charset="-122"/>
                 <a:cs typeface="Tiro Devanagari Hindi" pitchFamily="34" charset="-120"/>
               </a:rPr>
-              <a:t>प्रकृति — भौतिक प्रकृति</a:t>
+              <a:t>à¤ªà¥à¤°à¤•à¥ƒà¤¤à¤¿ â€” à¤­à¥Œà¤¤à¤¿à¤• à¤ªà¥à¤°à¤•à¥ƒà¤¤à¤¿</a:t>
             </a:r>
             <a:endParaRPr lang="en-US" sz="1300" dirty="0"/>
           </a:p>
@@ -18154,7 +18154,7 @@
                 <a:ea typeface="Cormorant Garamond" pitchFamily="34" charset="-122"/>
                 <a:cs typeface="Cormorant Garamond" pitchFamily="34" charset="-120"/>
               </a:rPr>
-              <a:t>BG 7.4–5 · 9.10</a:t>
+              <a:t>BG 7.4â€“5 Â· 9.10</a:t>
             </a:r>
             <a:endParaRPr lang="en-US" sz="950" dirty="0"/>
           </a:p>
@@ -18196,7 +18196,7 @@
                 <a:ea typeface="Tiro Devanagari Hindi" pitchFamily="34" charset="-122"/>
                 <a:cs typeface="Tiro Devanagari Hindi" pitchFamily="34" charset="-120"/>
               </a:rPr>
-              <a:t>हरि की अपनी निम्न प्रकृति — अष्टधा: पृथ्वी, जल, अग्नि, वायु, आकाश, मन, बुद्धि, अहंकार। सब रूपों की कोख।</a:t>
+              <a:t>à¤¹à¤°à¤¿ à¤•à¥€ à¤…à¤ªà¤¨à¥€ à¤¨à¤¿à¤®à¥à¤¨ à¤ªà¥à¤°à¤•à¥ƒà¤¤à¤¿ â€” à¤…à¤·à¥à¤Ÿà¤§à¤¾: à¤ªà¥ƒà¤¥à¥à¤µà¥€, à¤œà¤², à¤…à¤—à¥à¤¨à¤¿, à¤µà¤¾à¤¯à¥, à¤†à¤•à¤¾à¤¶, à¤®à¤¨, à¤¬à¥à¤¦à¥à¤§à¤¿, à¤…à¤¹à¤‚à¤•à¤¾à¤°à¥¤ à¤¸à¤¬ à¤°à¥‚à¤ªà¥‹à¤‚ à¤•à¥€ à¤•à¥‹à¤–à¥¤</a:t>
             </a:r>
             <a:endParaRPr lang="en-US" sz="1050" dirty="0"/>
           </a:p>
@@ -18285,7 +18285,7 @@
                 <a:ea typeface="Tiro Devanagari Hindi" pitchFamily="34" charset="-122"/>
                 <a:cs typeface="Tiro Devanagari Hindi" pitchFamily="34" charset="-120"/>
               </a:rPr>
-              <a:t>स्वभाव — अंतर्निहित प्रकृति</a:t>
+              <a:t>à¤¸à¥à¤µà¤­à¤¾à¤µ â€” à¤…à¤‚à¤¤à¤°à¥à¤¨à¤¿à¤¹à¤¿à¤¤ à¤ªà¥à¤°à¤•à¥ƒà¤¤à¤¿</a:t>
             </a:r>
             <a:endParaRPr lang="en-US" sz="1300" dirty="0"/>
           </a:p>
@@ -18324,7 +18324,7 @@
                 <a:ea typeface="Cormorant Garamond" pitchFamily="34" charset="-122"/>
                 <a:cs typeface="Cormorant Garamond" pitchFamily="34" charset="-120"/>
               </a:rPr>
-              <a:t>BG 5.14 · 8.3 · 18.41</a:t>
+              <a:t>BG 5.14 Â· 8.3 Â· 18.41</a:t>
             </a:r>
             <a:endParaRPr lang="en-US" sz="950" dirty="0"/>
           </a:p>
@@ -18366,7 +18366,7 @@
                 <a:ea typeface="Tiro Devanagari Hindi" pitchFamily="34" charset="-122"/>
                 <a:cs typeface="Tiro Devanagari Hindi" pitchFamily="34" charset="-120"/>
               </a:rPr>
-              <a:t>हर जीव की अनादि अंतर्निहित प्रकृति (मध्व में ‘स्वरूप-योग्यता’)। यह वर्ण, सामर्थ्य और अंतिम गति निर्धारित करती है।</a:t>
+              <a:t>à¤¹à¤° à¤œà¥€à¤µ à¤•à¥€ à¤…à¤¨à¤¾à¤¦à¤¿ à¤…à¤‚à¤¤à¤°à¥à¤¨à¤¿à¤¹à¤¿à¤¤ à¤ªà¥à¤°à¤•à¥ƒà¤¤à¤¿ (à¤®à¤§à¥à¤µ à¤®à¥‡à¤‚ â€˜à¤¸à¥à¤µà¤°à¥‚à¤ª-à¤¯à¥‹à¤—à¥à¤¯à¤¤à¤¾â€™)à¥¤ à¤¯à¤¹ à¤µà¤°à¥à¤£, à¤¸à¤¾à¤®à¤°à¥à¤¥à¥à¤¯ à¤”à¤° à¤…à¤‚à¤¤à¤¿à¤® à¤—à¤¤à¤¿ à¤¨à¤¿à¤°à¥…</a:t>
             </a:r>
             <a:endParaRPr lang="en-US" sz="1050" dirty="0"/>
           </a:p>
@@ -18455,7 +18455,7 @@
                 <a:ea typeface="Tiro Devanagari Hindi" pitchFamily="34" charset="-122"/>
                 <a:cs typeface="Tiro Devanagari Hindi" pitchFamily="34" charset="-120"/>
               </a:rPr>
-              <a:t>ईश्वर — विधाता</a:t>
+              <a:t>à¤ˆà¤¶à¥à¤µà¤° â€” à¤µà¤¿à¤§à¤¾à¤¤à¤¾</a:t>
             </a:r>
             <a:endParaRPr lang="en-US" sz="1300" dirty="0"/>
           </a:p>
@@ -18536,7 +18536,7 @@
                 <a:ea typeface="Tiro Devanagari Hindi" pitchFamily="34" charset="-122"/>
                 <a:cs typeface="Tiro Devanagari Hindi" pitchFamily="34" charset="-120"/>
               </a:rPr>
-              <a:t>हरि अंतर्यामी रूप में — हर हृदय में बैठकर जीवों को ‘यंत्र पर चढ़े’ की तरह माया द्वारा घुमाते हैं।</a:t>
+              <a:t>à¤¹à¤°à¤¿ à¤…à¤‚à¤¤à¤°à¥à¤¯à¤¾à¤®à¥€ à¤°à¥‚à¤ª à¤®à¥‡à¤‚ â€” à¤¹à¤° à¤¹à¥ƒà¤¦à¤¯ à¤®à¥‡à¤‚ à¤¬à¥ˆà¤ à¤•à¤° à¤œà¥€à¤µà¥‹à¤‚ à¤•à¥‹ â€˜à¤¯à¤‚à¤¤à¥à¤° à¤ªà¤° à¤šà¤¢à¤¼à¥‡â€™ à¤•à¥€ à¤¤à¤°à¤¹ à¤®à¤¾à¤¯à¤¾ à¤¦à¥à¤µà¤¾à¤°à¤¾ à¤˜à¥à¤®à¤¾à¤¤à¥‡ à¤¹à¥ˆà¤‚à¥¤</a:t>
             </a:r>
             <a:endParaRPr lang="en-US" sz="1050" dirty="0"/>
           </a:p>
@@ -18646,7 +18646,7 @@
                 <a:ea typeface="Tiro Devanagari Hindi" pitchFamily="34" charset="-122"/>
                 <a:cs typeface="Tiro Devanagari Hindi" pitchFamily="34" charset="-120"/>
               </a:rPr>
-              <a:t>क्षेत्र-क्षेत्रज्ञ</a:t>
+              <a:t>à¤•à¥à¤·à¥‡à¤¤à¥à¤°-à¤•à¥à¤·à¥‡à¤¤à¥à¤°à¤œà¥à¤ž</a:t>
             </a:r>
             <a:endParaRPr lang="en-US" sz="3000" dirty="0"/>
           </a:p>
@@ -18777,7 +18777,7 @@
                 <a:ea typeface="Tiro Devanagari Hindi" pitchFamily="34" charset="-122"/>
                 <a:cs typeface="Tiro Devanagari Hindi" pitchFamily="34" charset="-120"/>
               </a:rPr>
-              <a:t>क्षेत्रज्ञ — शरीर का ज्ञाता</a:t>
+              <a:t>à¤•à¥à¤·à¥‡à¤¤à¥à¤°à¤œà¥à¤ž â€” à¤¶à¤°à¥€à¤° à¤•à¤¾ à¤œà¥à¤žà¤¾à¤¤à¤¾</a:t>
             </a:r>
             <a:endParaRPr lang="en-US" sz="1300" dirty="0"/>
           </a:p>
@@ -18858,7 +18858,7 @@
                 <a:ea typeface="Tiro Devanagari Hindi" pitchFamily="34" charset="-122"/>
                 <a:cs typeface="Tiro Devanagari Hindi" pitchFamily="34" charset="-120"/>
               </a:rPr>
-              <a:t>क्षेत्र को जानने वाला साक्षी। कृष्ण कहते हैं: ‘क्षेत्रज्ञं चापि मां विद्धि सर्व-क्षेत्रेषु भारत’ — सर्व क्षेत्रों में हरि ही परम क्षेत्रज्ञ।</a:t>
+              <a:t>à¤•à¥à¤·à¥‡à¤¤à¥à¤° à¤•à¥‹ à¤œà¤¾à¤¨à¤¨à¥‡ à¤µà¤¾à¤²à¤¾ à¤¸à¤¾à¤•à¥à¤·à¥€à¥¤ à¤•à¥ƒà¤·à¥à¤£ à¤•à¤¹à¤¤à¥‡ à¤¹à¥ˆà¤‚: â€˜à¤•à¥à¤·à¥‡à¤¤à¥à¤°à¤œà¥à¤žà¤‚ à¤šà¤¾à¤ªà¤¿ à¤®à¤¾à¤‚ à¤µà¤¿à¤¦à¥à¤§à¤¿ à¤¸à¤°à¥à¤µ-à¤•à¥à¤·à¥‡à¤¤à¥à¤°à¥‡à¤·à¥ à¤­à¤¾à¤°à¤¤â€™…</a:t>
             </a:r>
             <a:endParaRPr lang="en-US" sz="1050" dirty="0"/>
           </a:p>
@@ -18947,7 +18947,7 @@
                 <a:ea typeface="Tiro Devanagari Hindi" pitchFamily="34" charset="-122"/>
                 <a:cs typeface="Tiro Devanagari Hindi" pitchFamily="34" charset="-120"/>
               </a:rPr>
-              <a:t>क्षेत्र — शरीर</a:t>
+              <a:t>à¤•à¥à¤·à¥‡à¤¤à¥à¤° â€” à¤¶à¤°à¥€à¤°</a:t>
             </a:r>
             <a:endParaRPr lang="en-US" sz="1300" dirty="0"/>
           </a:p>
@@ -18986,7 +18986,7 @@
                 <a:ea typeface="Cormorant Garamond" pitchFamily="34" charset="-122"/>
                 <a:cs typeface="Cormorant Garamond" pitchFamily="34" charset="-120"/>
               </a:rPr>
-              <a:t>BG 13.1 · 13.5–6</a:t>
+              <a:t>BG 13.1 Â· 13.5â€“6</a:t>
             </a:r>
             <a:endParaRPr lang="en-US" sz="950" dirty="0"/>
           </a:p>
@@ -19028,7 +19028,7 @@
                 <a:ea typeface="Tiro Devanagari Hindi" pitchFamily="34" charset="-122"/>
                 <a:cs typeface="Tiro Devanagari Hindi" pitchFamily="34" charset="-120"/>
               </a:rPr>
-              <a:t>यह शरीर अपने २४ तत्त्वों (महाभूत, अहंकार, बुद्धि, अव्यक्त, इंद्रियाँ, मन, विषय, इच्छा, द्वेष, सुख, दुख आदि) सहित — गीता १३.१–६ में ‘क्षेत्र’ है।</a:t>
+              <a:t>à¤¯à¤¹ à¤¶à¤°à¥€à¤° à¤…à¤ªà¤¨à¥‡ à¥¨à¥ª à¤¤à¤¤à¥à¤¤à¥à¤µà¥‹à¤‚ (à¤®à¤¹à¤¾à¤­à¥‚à¤¤, à¤…à¤¹à¤‚à¤•à¤¾à¤°, à¤¬à¥à¤¦à¥à¤§à¤¿, à¤…à¤µà¥à¤¯à¤•à¥à¤¤, à¤‡à¤‚à¤¦à¥à¤°à¤¿à¤¯à¤¾à¤, à¤®à¤¨, à¤µà¤¿à¤·à¤¯, à¤‡à¤šà¥à¤›à¤¾, à¤¦à¥à¤µà¥‡à¤·, à¤¸à¥à¤–, à¤¦à¥à¤– à¤†…</a:t>
             </a:r>
             <a:endParaRPr lang="en-US" sz="1050" dirty="0"/>
           </a:p>
@@ -19117,7 +19117,7 @@
                 <a:ea typeface="Tiro Devanagari Hindi" pitchFamily="34" charset="-122"/>
                 <a:cs typeface="Tiro Devanagari Hindi" pitchFamily="34" charset="-120"/>
               </a:rPr>
-              <a:t>पाँच महाभूत</a:t>
+              <a:t>à¤ªà¤¾à¤à¤š à¤®à¤¹à¤¾à¤­à¥‚à¤¤</a:t>
             </a:r>
             <a:endParaRPr lang="en-US" sz="1300" dirty="0"/>
           </a:p>
@@ -19198,7 +19198,7 @@
                 <a:ea typeface="Tiro Devanagari Hindi" pitchFamily="34" charset="-122"/>
                 <a:cs typeface="Tiro Devanagari Hindi" pitchFamily="34" charset="-120"/>
               </a:rPr>
-              <a:t>पृथ्वी, जल, अग्नि, वायु, आकाश — २४ क्षेत्र-घटकों में पहले पाँच।</a:t>
+              <a:t>à¤ªà¥ƒà¤¥à¥à¤µà¥€, à¤œà¤², à¤…à¤—à¥à¤¨à¤¿, à¤µà¤¾à¤¯à¥, à¤†à¤•à¤¾à¤¶ â€” à¥¨à¥ª à¤•à¥à¤·à¥‡à¤¤à¥à¤°-à¤˜à¤Ÿà¤•à¥‹à¤‚ à¤®à¥‡à¤‚ à¤ªà¤¹à¤²à¥‡ à¤ªà¤¾à¤à¤šà¥¤</a:t>
             </a:r>
             <a:endParaRPr lang="en-US" sz="1050" dirty="0"/>
           </a:p>
@@ -19287,7 +19287,7 @@
                 <a:ea typeface="Tiro Devanagari Hindi" pitchFamily="34" charset="-122"/>
                 <a:cs typeface="Tiro Devanagari Hindi" pitchFamily="34" charset="-120"/>
               </a:rPr>
-              <a:t>अव्यक्त</a:t>
+              <a:t>à¤…à¤µà¥à¤¯à¤•à¥à¤¤</a:t>
             </a:r>
             <a:endParaRPr lang="en-US" sz="1300" dirty="0"/>
           </a:p>
@@ -19326,7 +19326,7 @@
                 <a:ea typeface="Cormorant Garamond" pitchFamily="34" charset="-122"/>
                 <a:cs typeface="Cormorant Garamond" pitchFamily="34" charset="-120"/>
               </a:rPr>
-              <a:t>BG 13.5 · 8.18</a:t>
+              <a:t>BG 13.5 Â· 8.18</a:t>
             </a:r>
             <a:endParaRPr lang="en-US" sz="950" dirty="0"/>
           </a:p>
@@ -19368,7 +19368,7 @@
                 <a:ea typeface="Tiro Devanagari Hindi" pitchFamily="34" charset="-122"/>
                 <a:cs typeface="Tiro Devanagari Hindi" pitchFamily="34" charset="-120"/>
               </a:rPr>
-              <a:t>विकास से पहले की मूल प्रकृति। इसी से महत्, अहंकार और तन्मात्राएँ निकलती हैं।</a:t>
+              <a:t>à¤µà¤¿à¤•à¤¾à¤¸ à¤¸à¥‡ à¤ªà¤¹à¤²à¥‡ à¤•à¥€ à¤®à¥‚à¤² à¤ªà¥à¤°à¤•à¥ƒà¤¤à¤¿à¥¤ à¤‡à¤¸à¥€ à¤¸à¥‡ à¤®à¤¹à¤¤à¥, à¤…à¤¹à¤‚à¤•à¤¾à¤° à¤”à¤° à¤¤à¤¨à¥à¤®à¤¾à¤¤à¥à¤°à¤¾à¤à¤ à¤¨à¤¿à¤•à¤²à¤¤à¥€ à¤¹à¥ˆà¤‚à¥¤</a:t>
             </a:r>
             <a:endParaRPr lang="en-US" sz="1050" dirty="0"/>
           </a:p>
@@ -19478,7 +19478,7 @@
                 <a:ea typeface="Tiro Devanagari Hindi" pitchFamily="34" charset="-122"/>
                 <a:cs typeface="Tiro Devanagari Hindi" pitchFamily="34" charset="-120"/>
               </a:rPr>
-              <a:t>गुण</a:t>
+              <a:t>à¤—à¥à¤£</a:t>
             </a:r>
             <a:endParaRPr lang="en-US" sz="3000" dirty="0"/>
           </a:p>
@@ -19609,7 +19609,7 @@
                 <a:ea typeface="Tiro Devanagari Hindi" pitchFamily="34" charset="-122"/>
                 <a:cs typeface="Tiro Devanagari Hindi" pitchFamily="34" charset="-120"/>
               </a:rPr>
-              <a:t>सत्त्व — प्रकाश का गुण</a:t>
+              <a:t>à¤¸à¤¤à¥à¤¤à¥à¤µ â€” à¤ªà¥à¤°à¤•à¤¾à¤¶ à¤•à¤¾ à¤—à¥à¤£</a:t>
             </a:r>
             <a:endParaRPr lang="en-US" sz="1300" dirty="0"/>
           </a:p>
@@ -19648,7 +19648,7 @@
                 <a:ea typeface="Cormorant Garamond" pitchFamily="34" charset="-122"/>
                 <a:cs typeface="Cormorant Garamond" pitchFamily="34" charset="-120"/>
               </a:rPr>
-              <a:t>BG 14.6 · 14.11</a:t>
+              <a:t>BG 14.6 Â· 14.11</a:t>
             </a:r>
             <a:endParaRPr lang="en-US" sz="950" dirty="0"/>
           </a:p>
@@ -19690,7 +19690,7 @@
                 <a:ea typeface="Tiro Devanagari Hindi" pitchFamily="34" charset="-122"/>
                 <a:cs typeface="Tiro Devanagari Hindi" pitchFamily="34" charset="-120"/>
               </a:rPr>
-              <a:t>हल्का, प्रकाशमय, स्वस्थ — जीव को सुख और ज्ञान की आसक्ति से बाँधता है। विद्वानों में प्रमुख।</a:t>
+              <a:t>à¤¹à¤²à¥à¤•à¤¾, à¤ªà¥à¤°à¤•à¤¾à¤¶à¤®à¤¯, à¤¸à¥à¤µà¤¸à¥à¤¥ â€” à¤œà¥€à¤µ à¤•à¥‹ à¤¸à¥à¤– à¤”à¤° à¤œà¥à¤žà¤¾à¤¨ à¤•à¥€ à¤†à¤¸à¤•à¥à¤¤à¤¿ à¤¸à¥‡ à¤¬à¤¾à¤à¤§à¤¤à¤¾ à¤¹à¥ˆà¥¤ à¤µà¤¿à¤¦à¥à¤µà¤¾à¤¨à¥‹à¤‚ à¤®à¥‡à¤‚ à¤ªà¥à¤°à¤®à¥à¤–à¥¤</a:t>
             </a:r>
             <a:endParaRPr lang="en-US" sz="1050" dirty="0"/>
           </a:p>
@@ -19779,7 +19779,7 @@
                 <a:ea typeface="Tiro Devanagari Hindi" pitchFamily="34" charset="-122"/>
                 <a:cs typeface="Tiro Devanagari Hindi" pitchFamily="34" charset="-120"/>
               </a:rPr>
-              <a:t>रजस् — रागात्मक गुण</a:t>
+              <a:t>à¤°à¤œà¤¸à¥ â€” à¤°à¤¾à¤—à¤¾à¤¤à¥à¤®à¤• à¤—à¥à¤£</a:t>
             </a:r>
             <a:endParaRPr lang="en-US" sz="1300" dirty="0"/>
           </a:p>
@@ -19818,7 +19818,7 @@
                 <a:ea typeface="Cormorant Garamond" pitchFamily="34" charset="-122"/>
                 <a:cs typeface="Cormorant Garamond" pitchFamily="34" charset="-120"/>
               </a:rPr>
-              <a:t>BG 14.7 · 14.12</a:t>
+              <a:t>BG 14.7 Â· 14.12</a:t>
             </a:r>
             <a:endParaRPr lang="en-US" sz="950" dirty="0"/>
           </a:p>
@@ -19860,7 +19860,7 @@
                 <a:ea typeface="Tiro Devanagari Hindi" pitchFamily="34" charset="-122"/>
                 <a:cs typeface="Tiro Devanagari Hindi" pitchFamily="34" charset="-120"/>
               </a:rPr>
-              <a:t>लालसा और आसक्ति की प्रकृति का; तृष्णा और संग से उत्पन्न। निरंतर कर्म की प्रेरणा देता है।</a:t>
+              <a:t>à¤²à¤¾à¤²à¤¸à¤¾ à¤”à¤° à¤†à¤¸à¤•à¥à¤¤à¤¿ à¤•à¥€ à¤ªà¥à¤°à¤•à¥ƒà¤¤à¤¿ à¤•à¤¾; à¤¤à¥ƒà¤·à¥à¤£à¤¾ à¤”à¤° à¤¸à¤‚à¤— à¤¸à¥‡ à¤‰à¤¤à¥à¤ªà¤¨à¥à¤¨à¥¤ à¤¨à¤¿à¤°à¤‚à¤¤à¤° à¤•à¤°à¥à¤® à¤•à¥€ à¤ªà¥à¤°à¥‡à¤°à¤£à¤¾ à¤¦à¥‡à¤¤à¤¾ à¤¹à¥ˆà¥¤</a:t>
             </a:r>
             <a:endParaRPr lang="en-US" sz="1050" dirty="0"/>
           </a:p>
@@ -19949,7 +19949,7 @@
                 <a:ea typeface="Tiro Devanagari Hindi" pitchFamily="34" charset="-122"/>
                 <a:cs typeface="Tiro Devanagari Hindi" pitchFamily="34" charset="-120"/>
               </a:rPr>
-              <a:t>तमस् — अंधकार का गुण</a:t>
+              <a:t>à¤¤à¤®à¤¸à¥ â€” à¤…à¤‚à¤§à¤•à¤¾à¤° à¤•à¤¾ à¤—à¥à¤£</a:t>
             </a:r>
             <a:endParaRPr lang="en-US" sz="1300" dirty="0"/>
           </a:p>
@@ -19988,7 +19988,7 @@
                 <a:ea typeface="Cormorant Garamond" pitchFamily="34" charset="-122"/>
                 <a:cs typeface="Cormorant Garamond" pitchFamily="34" charset="-120"/>
               </a:rPr>
-              <a:t>BG 14.8 · 14.13</a:t>
+              <a:t>BG 14.8 Â· 14.13</a:t>
             </a:r>
             <a:endParaRPr lang="en-US" sz="950" dirty="0"/>
           </a:p>
@@ -20030,7 +20030,7 @@
                 <a:ea typeface="Tiro Devanagari Hindi" pitchFamily="34" charset="-122"/>
                 <a:cs typeface="Tiro Devanagari Hindi" pitchFamily="34" charset="-120"/>
               </a:rPr>
-              <a:t>अज्ञान से जन्मा — सब देहधारियों को मोह में डालता है; प्रमाद, आलस्य और नींद से बाँधता है।</a:t>
+              <a:t>à¤…à¤œà¥à¤žà¤¾à¤¨ à¤¸à¥‡ à¤œà¤¨à¥à¤®à¤¾ â€” à¤¸à¤¬ à¤¦à¥‡à¤¹à¤§à¤¾à¤°à¤¿à¤¯à¥‹à¤‚ à¤•à¥‹ à¤®à¥‹à¤¹ à¤®à¥‡à¤‚ à¤¡à¤¾à¤²à¤¤à¤¾ à¤¹à¥ˆ; à¤ªà¥à¤°à¤®à¤¾à¤¦, à¤†à¤²à¤¸à¥à¤¯ à¤”à¤° à¤¨à¥€à¤‚à¤¦ à¤¸à¥‡ à¤¬à¤¾à¤à¤§à¤¤à¤¾ à¤¹à¥ˆà¥¤</a:t>
             </a:r>
             <a:endParaRPr lang="en-US" sz="1050" dirty="0"/>
           </a:p>
@@ -20119,7 +20119,7 @@
                 <a:ea typeface="Tiro Devanagari Hindi" pitchFamily="34" charset="-122"/>
                 <a:cs typeface="Tiro Devanagari Hindi" pitchFamily="34" charset="-120"/>
               </a:rPr>
-              <a:t>गुणातीत</a:t>
+              <a:t>à¤—à¥à¤£à¤¾à¤¤à¥€à¤¤</a:t>
             </a:r>
             <a:endParaRPr lang="en-US" sz="1300" dirty="0"/>
           </a:p>
@@ -20158,7 +20158,7 @@
                 <a:ea typeface="Cormorant Garamond" pitchFamily="34" charset="-122"/>
                 <a:cs typeface="Cormorant Garamond" pitchFamily="34" charset="-120"/>
               </a:rPr>
-              <a:t>BG 14.22–25</a:t>
+              <a:t>BG 14.22â€“25</a:t>
             </a:r>
             <a:endParaRPr lang="en-US" sz="950" dirty="0"/>
           </a:p>
@@ -20200,7 +20200,7 @@
                 <a:ea typeface="Tiro Devanagari Hindi" pitchFamily="34" charset="-122"/>
                 <a:cs typeface="Tiro Devanagari Hindi" pitchFamily="34" charset="-120"/>
               </a:rPr>
-              <a:t>जिसमें आसक्ति से कोई गुण-आवेग नहीं उठता; जो मित्र और शत्रु को समान देखता है; जो सभी प्रयासों को त्याग देता है।</a:t>
+              <a:t>à¤œà¤¿à¤¸à¤®à¥‡à¤‚ à¤†à¤¸à¤•à¥à¤¤à¤¿ à¤¸à¥‡ à¤•à¥‹à¤ˆ à¤—à¥à¤£-à¤†à¤µà¥‡à¤— à¤¨à¤¹à¥€à¤‚ à¤‰à¤ à¤¤à¤¾; à¤œà¥‹ à¤®à¤¿à¤¤à¥à¤° à¤”à¤° à¤¶à¤¤à¥à¤°à¥ à¤•à¥‹ à¤¸à¤®à¤¾à¤¨ à¤¦à¥‡à¤–à¤¤à¤¾ à¤¹à¥ˆ; à¤œà¥‹ à¤¸à¤­à¥€ à¤ªà¥à¤°à¤¯à¤¾à¤¸à¥‹à¤‚ à¤•à¥‹ à¤¤à¥à¤¯à¤¾à¤…</a:t>
             </a:r>
             <a:endParaRPr lang="en-US" sz="1050" dirty="0"/>
           </a:p>
@@ -20310,7 +20310,7 @@
                 <a:ea typeface="Tiro Devanagari Hindi" pitchFamily="34" charset="-122"/>
                 <a:cs typeface="Tiro Devanagari Hindi" pitchFamily="34" charset="-120"/>
               </a:rPr>
-              <a:t>योग</a:t>
+              <a:t>à¤¯à¥‹à¤—</a:t>
             </a:r>
             <a:endParaRPr lang="en-US" sz="3000" dirty="0"/>
           </a:p>
@@ -20441,7 +20441,7 @@
                 <a:ea typeface="Tiro Devanagari Hindi" pitchFamily="34" charset="-122"/>
                 <a:cs typeface="Tiro Devanagari Hindi" pitchFamily="34" charset="-120"/>
               </a:rPr>
-              <a:t>भक्ति-योग — प्रेम का मार्ग</a:t>
+              <a:t>à¤­à¤•à¥à¤¤à¤¿-à¤¯à¥‹à¤— â€” à¤ªà¥à¤°à¥‡à¤® à¤•à¤¾ à¤®à¤¾à¤°à¥à¤—</a:t>
             </a:r>
             <a:endParaRPr lang="en-US" sz="1300" dirty="0"/>
           </a:p>
@@ -20480,7 +20480,7 @@
                 <a:ea typeface="Cormorant Garamond" pitchFamily="34" charset="-122"/>
                 <a:cs typeface="Cormorant Garamond" pitchFamily="34" charset="-120"/>
               </a:rPr>
-              <a:t>BG 9.22 · 11.54 · 18.55</a:t>
+              <a:t>BG 9.22 Â· 11.54 Â· 18.55</a:t>
             </a:r>
             <a:endParaRPr lang="en-US" sz="950" dirty="0"/>
           </a:p>
@@ -20522,7 +20522,7 @@
                 <a:ea typeface="Tiro Devanagari Hindi" pitchFamily="34" charset="-122"/>
                 <a:cs typeface="Tiro Devanagari Hindi" pitchFamily="34" charset="-120"/>
               </a:rPr>
-              <a:t>हरि का प्रेममय ज्ञान, जो अन्य सभी ज्ञानों से ऊपर है। मध्व के अनुसार भक्ति ‘स्थिर-ज्ञान-पूर्विका-प्रेम’ है — मोक्ष का अनिवार्य कारण।</a:t>
+              <a:t>à¤¹à¤°à¤¿ à¤•à¤¾ à¤ªà¥à¤°à¥‡à¤®à¤®à¤¯ à¤œà¥à¤žà¤¾à¤¨, à¤œà¥‹ à¤…à¤¨à¥à¤¯ à¤¸à¤­à¥€ à¤œà¥à¤žà¤¾à¤¨à¥‹à¤‚ à¤¸à¥‡ à¤Šà¤ªà¤° à¤¹à¥ˆà¥¤ à¤®à¤§à¥à¤µ à¤•à¥‡ à¤…à¤¨à¥à¤¸à¤¾à¤° à¤­à¤•à¥à¤¤à¤¿ â€˜à¤¸à¥à¤¥à¤¿à¤°-à¤œà¥à¤žà¤¾à¤¨-à¤ªà¥‚à¤°à¥à¤µà¤¿à¤•à¤¾-à¤ªà¥à¤…</a:t>
             </a:r>
             <a:endParaRPr lang="en-US" sz="1050" dirty="0"/>
           </a:p>
@@ -20611,7 +20611,7 @@
                 <a:ea typeface="Tiro Devanagari Hindi" pitchFamily="34" charset="-122"/>
                 <a:cs typeface="Tiro Devanagari Hindi" pitchFamily="34" charset="-120"/>
               </a:rPr>
-              <a:t>शरणागति — हरि के प्रति आत्मसमर्पण</a:t>
+              <a:t>à¤¶à¤°à¤£à¤¾à¤—à¤¤à¤¿ â€” à¤¹à¤°à¤¿ à¤•à¥‡ à¤ªà¥à¤°à¤¤à¤¿ à¤†à¤¤à¥à¤®à¤¸à¤®à¤°à¥à¤ªà¤£</a:t>
             </a:r>
             <a:endParaRPr lang="en-US" sz="1300" dirty="0"/>
           </a:p>
@@ -20692,7 +20692,7 @@
                 <a:ea typeface="Tiro Devanagari Hindi" pitchFamily="34" charset="-122"/>
                 <a:cs typeface="Tiro Devanagari Hindi" pitchFamily="34" charset="-120"/>
               </a:rPr>
-              <a:t>‘सर्व-धर्मान् परित्यज्य मामेकं शरणं व्रज’ — समापन-उपदेश। हरि की पूर्ण शरण, जो फिर सब पापों से छुड़ाते हैं।</a:t>
+              <a:t>â€˜à¤¸à¤°à¥à¤µ-à¤§à¤°à¥à¤®à¤¾à¤¨à¥ à¤ªà¤°à¤¿à¤¤à¥à¤¯à¤œà¥à¤¯ à¤®à¤¾à¤®à¥‡à¤•à¤‚ à¤¶à¤°à¤£à¤‚ à¤µà¥à¤°à¤œâ€™ â€” à¤¸à¤®à¤¾à¤ªà¤¨-à¤‰à¤ªà¤¦à¥‡à¤¶à¥¤ à¤¹à¤°à¤¿ à¤•à¥€ à¤ªà¥‚à¤°à¥à¤£ à¤¶à¤°à¤£, à¤œà¥‹ à¤«à¤¿à¤° à¤¸à¤¬ à¤ªà¤¾à¤ªà¥‹à¤‚ à¤¸à¥‡ à¤›à¥à¤¡à¤¼à¤…</a:t>
             </a:r>
             <a:endParaRPr lang="en-US" sz="1050" dirty="0"/>
           </a:p>
@@ -20781,7 +20781,7 @@
                 <a:ea typeface="Tiro Devanagari Hindi" pitchFamily="34" charset="-122"/>
                 <a:cs typeface="Tiro Devanagari Hindi" pitchFamily="34" charset="-120"/>
               </a:rPr>
-              <a:t>कर्म-योग — निष्काम कर्म का मार्ग</a:t>
+              <a:t>à¤•à¤°à¥à¤®-à¤¯à¥‹à¤— â€” à¤¨à¤¿à¤·à¥à¤•à¤¾à¤® à¤•à¤°à¥à¤® à¤•à¤¾ à¤®à¤¾à¤°à¥à¤—</a:t>
             </a:r>
             <a:endParaRPr lang="en-US" sz="1300" dirty="0"/>
           </a:p>
@@ -20820,7 +20820,7 @@
                 <a:ea typeface="Cormorant Garamond" pitchFamily="34" charset="-122"/>
                 <a:cs typeface="Cormorant Garamond" pitchFamily="34" charset="-120"/>
               </a:rPr>
-              <a:t>BG 3.3 · 3.19 · 5.2</a:t>
+              <a:t>BG 3.3 Â· 3.19 Â· 5.2</a:t>
             </a:r>
             <a:endParaRPr lang="en-US" sz="950" dirty="0"/>
           </a:p>
@@ -20862,7 +20862,7 @@
                 <a:ea typeface="Tiro Devanagari Hindi" pitchFamily="34" charset="-122"/>
                 <a:cs typeface="Tiro Devanagari Hindi" pitchFamily="34" charset="-120"/>
               </a:rPr>
-              <a:t>अपने कर्तव्य को हरि को अर्पण करते हुए, फल का त्याग करके निभाना। यह वह मार्ग है जो कृष्ण अर्जुन को सबसे अधिक बार सुझाते हैं।</a:t>
+              <a:t>à¤…à¤ªà¤¨à¥‡ à¤•à¤°à¥à¤¤à¤µà¥à¤¯ à¤•à¥‹ à¤¹à¤°à¤¿ à¤•à¥‹ à¤…à¤°à¥à¤ªà¤£ à¤•à¤°à¤¤à¥‡ à¤¹à¥à¤, à¤«à¤² à¤•à¤¾ à¤¤à¥à¤¯à¤¾à¤— à¤•à¤°à¤•à¥‡ à¤¨à¤¿à¤­à¤¾à¤¨à¤¾à¥¤ à¤¯à¤¹ à¤µà¤¹ à¤®à¤¾à¤°à¥à¤— à¤¹à¥ˆ à¤œà¥‹ à¤•à¥ƒà¤·à¥à¤£ à¤…à¤°à¥à¤œà¥à¤¨ à¤•à¥‹ à¤¸à¤¬à¤…</a:t>
             </a:r>
             <a:endParaRPr lang="en-US" sz="1050" dirty="0"/>
           </a:p>
@@ -20951,7 +20951,7 @@
                 <a:ea typeface="Tiro Devanagari Hindi" pitchFamily="34" charset="-122"/>
                 <a:cs typeface="Tiro Devanagari Hindi" pitchFamily="34" charset="-120"/>
               </a:rPr>
-              <a:t>ज्ञान-योग — विवेक का मार्ग</a:t>
+              <a:t>à¤œà¥à¤žà¤¾à¤¨-à¤¯à¥‹à¤— â€” à¤µà¤¿à¤µà¥‡à¤• à¤•à¤¾ à¤®à¤¾à¤°à¥à¤—</a:t>
             </a:r>
             <a:endParaRPr lang="en-US" sz="1300" dirty="0"/>
           </a:p>
@@ -20990,7 +20990,7 @@
                 <a:ea typeface="Cormorant Garamond" pitchFamily="34" charset="-122"/>
                 <a:cs typeface="Cormorant Garamond" pitchFamily="34" charset="-120"/>
               </a:rPr>
-              <a:t>BG 3.3 · 4.33–38</a:t>
+              <a:t>BG 3.3 Â· 4.33â€“38</a:t>
             </a:r>
             <a:endParaRPr lang="en-US" sz="950" dirty="0"/>
           </a:p>
@@ -21032,7 +21032,7 @@
                 <a:ea typeface="Tiro Devanagari Hindi" pitchFamily="34" charset="-122"/>
                 <a:cs typeface="Tiro Devanagari Hindi" pitchFamily="34" charset="-120"/>
               </a:rPr>
-              <a:t>हरि को परम जानना, जीव को उनका अंश मानना, जगत को उनकी निर्भर वास्तविकता समझना। अधिकारी साधक के लिए यही साधन।</a:t>
+              <a:t>à¤¹à¤°à¤¿ à¤•à¥‹ à¤ªà¤°à¤® à¤œà¤¾à¤¨à¤¨à¤¾, à¤œà¥€à¤µ à¤•à¥‹ à¤‰à¤¨à¤•à¤¾ à¤…à¤‚à¤¶ à¤®à¤¾à¤¨à¤¨à¤¾, à¤œà¤—à¤¤ à¤•à¥‹ à¤‰à¤¨à¤•à¥€ à¤¨à¤¿à¤°à¥à¤­à¤° à¤µà¤¾à¤¸à¥à¤¤à¤µà¤¿à¤•à¤¤à¤¾ à¤¸à¤®à¤à¤¨à¤¾à¥¤ à¤…à¤§à¤¿à¤•à¤¾à¤°à¥€ à¤¸à¤¾à¤§à¤• à¤•à¥‡ à¤²à¤¿à¤ à¤¯à¤¹…</a:t>
             </a:r>
             <a:endParaRPr lang="en-US" sz="1050" dirty="0"/>
           </a:p>
@@ -21142,7 +21142,7 @@
                 <a:ea typeface="Tiro Devanagari Hindi" pitchFamily="34" charset="-122"/>
                 <a:cs typeface="Tiro Devanagari Hindi" pitchFamily="34" charset="-120"/>
               </a:rPr>
-              <a:t>साधना</a:t>
+              <a:t>à¤¸à¤¾à¤§à¤¨à¤¾</a:t>
             </a:r>
             <a:endParaRPr lang="en-US" sz="3000" dirty="0"/>
           </a:p>
@@ -21273,7 +21273,7 @@
                 <a:ea typeface="Tiro Devanagari Hindi" pitchFamily="34" charset="-122"/>
                 <a:cs typeface="Tiro Devanagari Hindi" pitchFamily="34" charset="-120"/>
               </a:rPr>
-              <a:t>श्रद्धा</a:t>
+              <a:t>à¤¶à¥à¤°à¤¦à¥à¤§à¤¾</a:t>
             </a:r>
             <a:endParaRPr lang="en-US" sz="1300" dirty="0"/>
           </a:p>
@@ -21312,7 +21312,7 @@
                 <a:ea typeface="Cormorant Garamond" pitchFamily="34" charset="-122"/>
                 <a:cs typeface="Cormorant Garamond" pitchFamily="34" charset="-120"/>
               </a:rPr>
-              <a:t>BG 17.2–3</a:t>
+              <a:t>BG 17.2â€“3</a:t>
             </a:r>
             <a:endParaRPr lang="en-US" sz="950" dirty="0"/>
           </a:p>
@@ -21354,7 +21354,7 @@
                 <a:ea typeface="Tiro Devanagari Hindi" pitchFamily="34" charset="-122"/>
                 <a:cs typeface="Tiro Devanagari Hindi" pitchFamily="34" charset="-120"/>
               </a:rPr>
-              <a:t>श्रद्धा स्वभाव से उठती है; मनुष्य जैसी श्रद्धा रखता है, वैसा ही होता है। गुण के अनुसार तीन — सात्त्विक देवों में, राजसी यक्षों में, तामसी भूतों में।</a:t>
+              <a:t>à¤¶à¥à¤°à¤¦à¥à¤§à¤¾ à¤¸à¥à¤µà¤­à¤¾à¤µ à¤¸à¥‡ à¤‰à¤ à¤¤à¥€ à¤¹à¥ˆ; à¤®à¤¨à¥à¤·à¥à¤¯ à¤œà¥ˆà¤¸à¥€ à¤¶à¥à¤°à¤¦à¥à¤§à¤¾ à¤°à¤–à¤¤à¤¾ à¤¹à¥ˆ, à¤µà¥ˆà¤¸à¤¾ à¤¹à¥€ à¤¹à¥‹à¤¤à¤¾ à¤¹à¥ˆà¥¤ à¤—à¥à¤£ à¤•à¥‡ à¤…à¤¨à¥à¤¸à¤¾à¤° à¤¤à¥€à¤¨ â€” à¤¸à¤¾à¤¤à¥à¤¤à¥à¤µ…</a:t>
             </a:r>
             <a:endParaRPr lang="en-US" sz="1050" dirty="0"/>
           </a:p>
@@ -21443,7 +21443,7 @@
                 <a:ea typeface="Tiro Devanagari Hindi" pitchFamily="34" charset="-122"/>
                 <a:cs typeface="Tiro Devanagari Hindi" pitchFamily="34" charset="-120"/>
               </a:rPr>
-              <a:t>वैराग्य — अनासक्ति</a:t>
+              <a:t>à¤µà¥ˆà¤°à¤¾à¤—à¥à¤¯ â€” à¤…à¤¨à¤¾à¤¸à¤•à¥à¤¤à¤¿</a:t>
             </a:r>
             <a:endParaRPr lang="en-US" sz="1300" dirty="0"/>
           </a:p>
@@ -21482,7 +21482,7 @@
                 <a:ea typeface="Cormorant Garamond" pitchFamily="34" charset="-122"/>
                 <a:cs typeface="Cormorant Garamond" pitchFamily="34" charset="-120"/>
               </a:rPr>
-              <a:t>BG 6.35 · 13.8–11</a:t>
+              <a:t>BG 6.35 Â· 13.8â€“11</a:t>
             </a:r>
             <a:endParaRPr lang="en-US" sz="950" dirty="0"/>
           </a:p>
@@ -21524,7 +21524,7 @@
                 <a:ea typeface="Tiro Devanagari Hindi" pitchFamily="34" charset="-122"/>
                 <a:cs typeface="Tiro Devanagari Hindi" pitchFamily="34" charset="-120"/>
               </a:rPr>
-              <a:t>विषयों से अनासक्ति — जीवन का त्याग नहीं, बल्कि बंधन रचने वाले आकर्षणों को ठीक से पहचान लेना।</a:t>
+              <a:t>à¤µà¤¿à¤·à¤¯à¥‹à¤‚ à¤¸à¥‡ à¤…à¤¨à¤¾à¤¸à¤•à¥à¤¤à¤¿ â€” à¤œà¥€à¤µà¤¨ à¤•à¤¾ à¤¤à¥à¤¯à¤¾à¤— à¤¨à¤¹à¥€à¤‚, à¤¬à¤²à¥à¤•à¤¿ à¤¬à¤‚à¤§à¤¨ à¤°à¤šà¤¨à¥‡ à¤µà¤¾à¤²à¥‡ à¤†à¤•à¤°à¥à¤·à¤£à¥‹à¤‚ à¤•à¥‹ à¤ à¥€à¤• à¤¸à¥‡ à¤ªà¤¹à¤šà¤¾à¤¨ à¤²à¥‡à¤¨à¤¾à¥¤</a:t>
             </a:r>
             <a:endParaRPr lang="en-US" sz="1050" dirty="0"/>
           </a:p>
@@ -21613,7 +21613,7 @@
                 <a:ea typeface="Tiro Devanagari Hindi" pitchFamily="34" charset="-122"/>
                 <a:cs typeface="Tiro Devanagari Hindi" pitchFamily="34" charset="-120"/>
               </a:rPr>
-              <a:t>अभ्यास — पुनः-पुनः साधना</a:t>
+              <a:t>à¤…à¤­à¥à¤¯à¤¾à¤¸ â€” à¤ªà¥à¤¨à¤ƒ-à¤ªà¥à¤¨à¤ƒ à¤¸à¤¾à¤§à¤¨à¤¾</a:t>
             </a:r>
             <a:endParaRPr lang="en-US" sz="1300" dirty="0"/>
           </a:p>
@@ -21652,7 +21652,7 @@
                 <a:ea typeface="Cormorant Garamond" pitchFamily="34" charset="-122"/>
                 <a:cs typeface="Cormorant Garamond" pitchFamily="34" charset="-120"/>
               </a:rPr>
-              <a:t>BG 6.26 · 12.9</a:t>
+              <a:t>BG 6.26 Â· 12.9</a:t>
             </a:r>
             <a:endParaRPr lang="en-US" sz="950" dirty="0"/>
           </a:p>
@@ -21694,7 +21694,7 @@
                 <a:ea typeface="Tiro Devanagari Hindi" pitchFamily="34" charset="-122"/>
                 <a:cs typeface="Tiro Devanagari Hindi" pitchFamily="34" charset="-120"/>
               </a:rPr>
-              <a:t>‘समाधि-अभ्यास’ — भटकते मन को बार-बार हरि की ओर वापस लाना।</a:t>
+              <a:t>â€˜à¤¸à¤®à¤¾à¤§à¤¿-à¤…à¤­à¥à¤¯à¤¾à¤¸â€™ â€” à¤­à¤Ÿà¤•à¤¤à¥‡ à¤®à¤¨ à¤•à¥‹ à¤¬à¤¾à¤°-à¤¬à¤¾à¤° à¤¹à¤°à¤¿ à¤•à¥€ à¤“à¤° à¤µà¤¾à¤ªà¤¸ à¤²à¤¾à¤¨à¤¾à¥¤</a:t>
             </a:r>
             <a:endParaRPr lang="en-US" sz="1050" dirty="0"/>
           </a:p>
@@ -21783,7 +21783,7 @@
                 <a:ea typeface="Tiro Devanagari Hindi" pitchFamily="34" charset="-122"/>
                 <a:cs typeface="Tiro Devanagari Hindi" pitchFamily="34" charset="-120"/>
               </a:rPr>
-              <a:t>तपस् — तीन प्रकार का</a:t>
+              <a:t>à¤¤à¤ªà¤¸à¥ â€” à¤¤à¥€à¤¨ à¤ªà¥à¤°à¤•à¤¾à¤° à¤•à¤¾</a:t>
             </a:r>
             <a:endParaRPr lang="en-US" sz="1300" dirty="0"/>
           </a:p>
@@ -21822,7 +21822,7 @@
                 <a:ea typeface="Cormorant Garamond" pitchFamily="34" charset="-122"/>
                 <a:cs typeface="Cormorant Garamond" pitchFamily="34" charset="-120"/>
               </a:rPr>
-              <a:t>BG 17.14–19</a:t>
+              <a:t>BG 17.14â€“19</a:t>
             </a:r>
             <a:endParaRPr lang="en-US" sz="950" dirty="0"/>
           </a:p>
@@ -21864,7 +21864,7 @@
                 <a:ea typeface="Tiro Devanagari Hindi" pitchFamily="34" charset="-122"/>
                 <a:cs typeface="Tiro Devanagari Hindi" pitchFamily="34" charset="-120"/>
               </a:rPr>
-              <a:t>शरीर का तप (पूजा/शुद्धता/ब्रह्मचर्य), वाणी का तप (सत्य/मधुरता/स्वाध्याय), मन का तप (शांति/मौन/आत्म-संयम)। तीनों गुण-भेद से त्रिविध।</a:t>
+              <a:t>à¤¶à¤°à¥€à¤° à¤•à¤¾ à¤¤à¤ª (à¤ªà¥‚à¤œà¤¾/à¤¶à¥à¤¦à¥à¤§à¤¤à¤¾/à¤¬à¥à¤°à¤¹à¥à¤®à¤šà¤°à¥à¤¯), à¤µà¤¾à¤£à¥€ à¤•à¤¾ à¤¤à¤ª (à¤¸à¤¤à¥à¤¯/à¤®à¤§à¥à¤°à¤¤à¤¾/à¤¸à¥à¤µà¤¾à¤§à¥à¤¯à¤¾à¤¯), à¤®à¤¨ à¤•à¤¾ à¤¤à¤ª (à¤¶à¤¾à¤‚à¤¤à¤¿/à¤®à¥Œà¤¨/à¤†à¤¤à¥à¤®-à¤¸à¤‚à¤¯à¤…</a:t>
             </a:r>
             <a:endParaRPr lang="en-US" sz="1050" dirty="0"/>
           </a:p>
